--- a/Karl_Second Revision/Waveforms_fig_v2.pptx
+++ b/Karl_Second Revision/Waveforms_fig_v2.pptx
@@ -8,10 +8,13 @@
     <p:sldId id="258" r:id="rId2"/>
     <p:sldId id="259" r:id="rId3"/>
     <p:sldId id="260" r:id="rId4"/>
-    <p:sldId id="256" r:id="rId5"/>
-    <p:sldId id="261" r:id="rId6"/>
-    <p:sldId id="257" r:id="rId7"/>
-    <p:sldId id="262" r:id="rId8"/>
+    <p:sldId id="264" r:id="rId5"/>
+    <p:sldId id="256" r:id="rId6"/>
+    <p:sldId id="261" r:id="rId7"/>
+    <p:sldId id="265" r:id="rId8"/>
+    <p:sldId id="257" r:id="rId9"/>
+    <p:sldId id="262" r:id="rId10"/>
+    <p:sldId id="263" r:id="rId11"/>
   </p:sldIdLst>
   <p:sldSz cx="12192000" cy="8783638"/>
   <p:notesSz cx="6858000" cy="9144000"/>
@@ -249,7 +252,7 @@
           <a:p>
             <a:fld id="{EE7F2677-E5D1-48BB-B124-3CAA138518D8}" type="datetimeFigureOut">
               <a:rPr lang="en-US" smtClean="0"/>
-              <a:t>8/10/2026</a:t>
+              <a:t>10/10/2026</a:t>
             </a:fld>
             <a:endParaRPr lang="en-US"/>
           </a:p>
@@ -419,7 +422,7 @@
           <a:p>
             <a:fld id="{EE7F2677-E5D1-48BB-B124-3CAA138518D8}" type="datetimeFigureOut">
               <a:rPr lang="en-US" smtClean="0"/>
-              <a:t>8/10/2026</a:t>
+              <a:t>10/10/2026</a:t>
             </a:fld>
             <a:endParaRPr lang="en-US"/>
           </a:p>
@@ -599,7 +602,7 @@
           <a:p>
             <a:fld id="{EE7F2677-E5D1-48BB-B124-3CAA138518D8}" type="datetimeFigureOut">
               <a:rPr lang="en-US" smtClean="0"/>
-              <a:t>8/10/2026</a:t>
+              <a:t>10/10/2026</a:t>
             </a:fld>
             <a:endParaRPr lang="en-US"/>
           </a:p>
@@ -769,7 +772,7 @@
           <a:p>
             <a:fld id="{EE7F2677-E5D1-48BB-B124-3CAA138518D8}" type="datetimeFigureOut">
               <a:rPr lang="en-US" smtClean="0"/>
-              <a:t>8/10/2026</a:t>
+              <a:t>10/10/2026</a:t>
             </a:fld>
             <a:endParaRPr lang="en-US"/>
           </a:p>
@@ -1015,7 +1018,7 @@
           <a:p>
             <a:fld id="{EE7F2677-E5D1-48BB-B124-3CAA138518D8}" type="datetimeFigureOut">
               <a:rPr lang="en-US" smtClean="0"/>
-              <a:t>8/10/2026</a:t>
+              <a:t>10/10/2026</a:t>
             </a:fld>
             <a:endParaRPr lang="en-US"/>
           </a:p>
@@ -1247,7 +1250,7 @@
           <a:p>
             <a:fld id="{EE7F2677-E5D1-48BB-B124-3CAA138518D8}" type="datetimeFigureOut">
               <a:rPr lang="en-US" smtClean="0"/>
-              <a:t>8/10/2026</a:t>
+              <a:t>10/10/2026</a:t>
             </a:fld>
             <a:endParaRPr lang="en-US"/>
           </a:p>
@@ -1614,7 +1617,7 @@
           <a:p>
             <a:fld id="{EE7F2677-E5D1-48BB-B124-3CAA138518D8}" type="datetimeFigureOut">
               <a:rPr lang="en-US" smtClean="0"/>
-              <a:t>8/10/2026</a:t>
+              <a:t>10/10/2026</a:t>
             </a:fld>
             <a:endParaRPr lang="en-US"/>
           </a:p>
@@ -1732,7 +1735,7 @@
           <a:p>
             <a:fld id="{EE7F2677-E5D1-48BB-B124-3CAA138518D8}" type="datetimeFigureOut">
               <a:rPr lang="en-US" smtClean="0"/>
-              <a:t>8/10/2026</a:t>
+              <a:t>10/10/2026</a:t>
             </a:fld>
             <a:endParaRPr lang="en-US"/>
           </a:p>
@@ -1827,7 +1830,7 @@
           <a:p>
             <a:fld id="{EE7F2677-E5D1-48BB-B124-3CAA138518D8}" type="datetimeFigureOut">
               <a:rPr lang="en-US" smtClean="0"/>
-              <a:t>8/10/2026</a:t>
+              <a:t>10/10/2026</a:t>
             </a:fld>
             <a:endParaRPr lang="en-US"/>
           </a:p>
@@ -2104,7 +2107,7 @@
           <a:p>
             <a:fld id="{EE7F2677-E5D1-48BB-B124-3CAA138518D8}" type="datetimeFigureOut">
               <a:rPr lang="en-US" smtClean="0"/>
-              <a:t>8/10/2026</a:t>
+              <a:t>10/10/2026</a:t>
             </a:fld>
             <a:endParaRPr lang="en-US"/>
           </a:p>
@@ -2361,7 +2364,7 @@
           <a:p>
             <a:fld id="{EE7F2677-E5D1-48BB-B124-3CAA138518D8}" type="datetimeFigureOut">
               <a:rPr lang="en-US" smtClean="0"/>
-              <a:t>8/10/2026</a:t>
+              <a:t>10/10/2026</a:t>
             </a:fld>
             <a:endParaRPr lang="en-US"/>
           </a:p>
@@ -2574,7 +2577,7 @@
           <a:p>
             <a:fld id="{EE7F2677-E5D1-48BB-B124-3CAA138518D8}" type="datetimeFigureOut">
               <a:rPr lang="en-US" smtClean="0"/>
-              <a:t>8/10/2026</a:t>
+              <a:t>10/10/2026</a:t>
             </a:fld>
             <a:endParaRPr lang="en-US"/>
           </a:p>
@@ -3822,6 +3825,884 @@
     <p:extLst>
       <p:ext uri="{BB962C8B-B14F-4D97-AF65-F5344CB8AC3E}">
         <p14:creationId xmlns:p14="http://schemas.microsoft.com/office/powerpoint/2010/main" val="493501447"/>
+      </p:ext>
+    </p:extLst>
+  </p:cSld>
+  <p:clrMapOvr>
+    <a:masterClrMapping/>
+  </p:clrMapOvr>
+</p:sld>
+</file>
+
+<file path=ppt/slides/slide10.xml><?xml version="1.0" encoding="utf-8"?>
+<p:sld xmlns:a="http://schemas.openxmlformats.org/drawingml/2006/main" xmlns:r="http://schemas.openxmlformats.org/officeDocument/2006/relationships" xmlns:p="http://schemas.openxmlformats.org/presentationml/2006/main" show="0">
+  <p:cSld>
+    <p:spTree>
+      <p:nvGrpSpPr>
+        <p:cNvPr id="1" name="">
+          <a:extLst>
+            <a:ext uri="{FF2B5EF4-FFF2-40B4-BE49-F238E27FC236}">
+              <a16:creationId xmlns:a16="http://schemas.microsoft.com/office/drawing/2014/main" id="{D51CCE3D-2A07-2EEB-9E1A-EB2B264F14D7}"/>
+            </a:ext>
+          </a:extLst>
+        </p:cNvPr>
+        <p:cNvGrpSpPr/>
+        <p:nvPr/>
+      </p:nvGrpSpPr>
+      <p:grpSpPr>
+        <a:xfrm>
+          <a:off x="0" y="0"/>
+          <a:ext cx="0" cy="0"/>
+          <a:chOff x="0" y="0"/>
+          <a:chExt cx="0" cy="0"/>
+        </a:xfrm>
+      </p:grpSpPr>
+      <p:pic>
+        <p:nvPicPr>
+          <p:cNvPr id="10" name="Picture 9">
+            <a:extLst>
+              <a:ext uri="{FF2B5EF4-FFF2-40B4-BE49-F238E27FC236}">
+                <a16:creationId xmlns:a16="http://schemas.microsoft.com/office/drawing/2014/main" id="{4F6EA2EA-8971-28CE-8ABE-08E1BDFCC3CF}"/>
+              </a:ext>
+            </a:extLst>
+          </p:cNvPr>
+          <p:cNvPicPr>
+            <a:picLocks noChangeAspect="1"/>
+          </p:cNvPicPr>
+          <p:nvPr/>
+        </p:nvPicPr>
+        <p:blipFill>
+          <a:blip r:embed="rId2">
+            <a:extLst>
+              <a:ext uri="{28A0092B-C50C-407E-A947-70E740481C1C}">
+                <a14:useLocalDpi xmlns:a14="http://schemas.microsoft.com/office/drawing/2010/main" val="0"/>
+              </a:ext>
+            </a:extLst>
+          </a:blip>
+          <a:stretch>
+            <a:fillRect/>
+          </a:stretch>
+        </p:blipFill>
+        <p:spPr>
+          <a:xfrm>
+            <a:off x="0" y="962819"/>
+            <a:ext cx="12226988" cy="6858000"/>
+          </a:xfrm>
+          <a:prstGeom prst="rect">
+            <a:avLst/>
+          </a:prstGeom>
+        </p:spPr>
+      </p:pic>
+      <p:sp>
+        <p:nvSpPr>
+          <p:cNvPr id="57" name="テキスト プレースホルダー 2">
+            <a:extLst>
+              <a:ext uri="{FF2B5EF4-FFF2-40B4-BE49-F238E27FC236}">
+                <a16:creationId xmlns:a16="http://schemas.microsoft.com/office/drawing/2014/main" id="{7C6248A8-3D0C-CFB7-9AB3-60869319410B}"/>
+              </a:ext>
+            </a:extLst>
+          </p:cNvPr>
+          <p:cNvSpPr txBox="1">
+            <a:spLocks/>
+          </p:cNvSpPr>
+          <p:nvPr/>
+        </p:nvSpPr>
+        <p:spPr>
+          <a:xfrm>
+            <a:off x="350158" y="2151654"/>
+            <a:ext cx="6736442" cy="4964949"/>
+          </a:xfrm>
+          <a:prstGeom prst="rect">
+            <a:avLst/>
+          </a:prstGeom>
+        </p:spPr>
+        <p:txBody>
+          <a:bodyPr vert="horz" lIns="91440" tIns="45720" rIns="91440" bIns="45720" numCol="1" spcCol="828000" rtlCol="0">
+            <a:normAutofit/>
+          </a:bodyPr>
+          <a:lstStyle>
+            <a:lvl1pPr marL="228600" indent="-228600" algn="l" defTabSz="914400" rtl="0" eaLnBrk="1" latinLnBrk="0" hangingPunct="1">
+              <a:lnSpc>
+                <a:spcPct val="90000"/>
+              </a:lnSpc>
+              <a:spcBef>
+                <a:spcPts val="1000"/>
+              </a:spcBef>
+              <a:buFont typeface="Arial" panose="020B0604020202020204" pitchFamily="34" charset="0"/>
+              <a:buChar char="•"/>
+              <a:defRPr sz="2800" kern="1200">
+                <a:solidFill>
+                  <a:schemeClr val="tx1"/>
+                </a:solidFill>
+                <a:latin typeface="+mn-lt"/>
+                <a:ea typeface="+mn-ea"/>
+                <a:cs typeface="+mn-cs"/>
+              </a:defRPr>
+            </a:lvl1pPr>
+            <a:lvl2pPr marL="685800" indent="-228600" algn="l" defTabSz="914400" rtl="0" eaLnBrk="1" latinLnBrk="0" hangingPunct="1">
+              <a:lnSpc>
+                <a:spcPct val="90000"/>
+              </a:lnSpc>
+              <a:spcBef>
+                <a:spcPts val="500"/>
+              </a:spcBef>
+              <a:buFont typeface="Arial" panose="020B0604020202020204" pitchFamily="34" charset="0"/>
+              <a:buChar char="•"/>
+              <a:defRPr sz="2400" kern="1200">
+                <a:solidFill>
+                  <a:schemeClr val="tx1"/>
+                </a:solidFill>
+                <a:latin typeface="+mn-lt"/>
+                <a:ea typeface="+mn-ea"/>
+                <a:cs typeface="+mn-cs"/>
+              </a:defRPr>
+            </a:lvl2pPr>
+            <a:lvl3pPr marL="1143000" indent="-228600" algn="l" defTabSz="914400" rtl="0" eaLnBrk="1" latinLnBrk="0" hangingPunct="1">
+              <a:lnSpc>
+                <a:spcPct val="90000"/>
+              </a:lnSpc>
+              <a:spcBef>
+                <a:spcPts val="500"/>
+              </a:spcBef>
+              <a:buFont typeface="Arial" panose="020B0604020202020204" pitchFamily="34" charset="0"/>
+              <a:buChar char="•"/>
+              <a:defRPr sz="2000" kern="1200">
+                <a:solidFill>
+                  <a:schemeClr val="tx1"/>
+                </a:solidFill>
+                <a:latin typeface="+mn-lt"/>
+                <a:ea typeface="+mn-ea"/>
+                <a:cs typeface="+mn-cs"/>
+              </a:defRPr>
+            </a:lvl3pPr>
+            <a:lvl4pPr marL="1600200" indent="-228600" algn="l" defTabSz="914400" rtl="0" eaLnBrk="1" latinLnBrk="0" hangingPunct="1">
+              <a:lnSpc>
+                <a:spcPct val="90000"/>
+              </a:lnSpc>
+              <a:spcBef>
+                <a:spcPts val="500"/>
+              </a:spcBef>
+              <a:buFont typeface="Arial" panose="020B0604020202020204" pitchFamily="34" charset="0"/>
+              <a:buChar char="•"/>
+              <a:defRPr sz="1800" kern="1200">
+                <a:solidFill>
+                  <a:schemeClr val="tx1"/>
+                </a:solidFill>
+                <a:latin typeface="+mn-lt"/>
+                <a:ea typeface="+mn-ea"/>
+                <a:cs typeface="+mn-cs"/>
+              </a:defRPr>
+            </a:lvl4pPr>
+            <a:lvl5pPr marL="2057400" indent="-228600" algn="l" defTabSz="914400" rtl="0" eaLnBrk="1" latinLnBrk="0" hangingPunct="1">
+              <a:lnSpc>
+                <a:spcPct val="90000"/>
+              </a:lnSpc>
+              <a:spcBef>
+                <a:spcPts val="500"/>
+              </a:spcBef>
+              <a:buFont typeface="Arial" panose="020B0604020202020204" pitchFamily="34" charset="0"/>
+              <a:buChar char="•"/>
+              <a:defRPr sz="1800" kern="1200">
+                <a:solidFill>
+                  <a:schemeClr val="tx1"/>
+                </a:solidFill>
+                <a:latin typeface="+mn-lt"/>
+                <a:ea typeface="+mn-ea"/>
+                <a:cs typeface="+mn-cs"/>
+              </a:defRPr>
+            </a:lvl5pPr>
+            <a:lvl6pPr marL="2514600" indent="-228600" algn="l" defTabSz="914400" rtl="0" eaLnBrk="1" latinLnBrk="0" hangingPunct="1">
+              <a:lnSpc>
+                <a:spcPct val="90000"/>
+              </a:lnSpc>
+              <a:spcBef>
+                <a:spcPts val="500"/>
+              </a:spcBef>
+              <a:buFont typeface="Arial" panose="020B0604020202020204" pitchFamily="34" charset="0"/>
+              <a:buChar char="•"/>
+              <a:defRPr sz="1800" kern="1200">
+                <a:solidFill>
+                  <a:schemeClr val="tx1"/>
+                </a:solidFill>
+                <a:latin typeface="+mn-lt"/>
+                <a:ea typeface="+mn-ea"/>
+                <a:cs typeface="+mn-cs"/>
+              </a:defRPr>
+            </a:lvl6pPr>
+            <a:lvl7pPr marL="2971800" indent="-228600" algn="l" defTabSz="914400" rtl="0" eaLnBrk="1" latinLnBrk="0" hangingPunct="1">
+              <a:lnSpc>
+                <a:spcPct val="90000"/>
+              </a:lnSpc>
+              <a:spcBef>
+                <a:spcPts val="500"/>
+              </a:spcBef>
+              <a:buFont typeface="Arial" panose="020B0604020202020204" pitchFamily="34" charset="0"/>
+              <a:buChar char="•"/>
+              <a:defRPr sz="1800" kern="1200">
+                <a:solidFill>
+                  <a:schemeClr val="tx1"/>
+                </a:solidFill>
+                <a:latin typeface="+mn-lt"/>
+                <a:ea typeface="+mn-ea"/>
+                <a:cs typeface="+mn-cs"/>
+              </a:defRPr>
+            </a:lvl7pPr>
+            <a:lvl8pPr marL="3429000" indent="-228600" algn="l" defTabSz="914400" rtl="0" eaLnBrk="1" latinLnBrk="0" hangingPunct="1">
+              <a:lnSpc>
+                <a:spcPct val="90000"/>
+              </a:lnSpc>
+              <a:spcBef>
+                <a:spcPts val="500"/>
+              </a:spcBef>
+              <a:buFont typeface="Arial" panose="020B0604020202020204" pitchFamily="34" charset="0"/>
+              <a:buChar char="•"/>
+              <a:defRPr sz="1800" kern="1200">
+                <a:solidFill>
+                  <a:schemeClr val="tx1"/>
+                </a:solidFill>
+                <a:latin typeface="+mn-lt"/>
+                <a:ea typeface="+mn-ea"/>
+                <a:cs typeface="+mn-cs"/>
+              </a:defRPr>
+            </a:lvl8pPr>
+            <a:lvl9pPr marL="3886200" indent="-228600" algn="l" defTabSz="914400" rtl="0" eaLnBrk="1" latinLnBrk="0" hangingPunct="1">
+              <a:lnSpc>
+                <a:spcPct val="90000"/>
+              </a:lnSpc>
+              <a:spcBef>
+                <a:spcPts val="500"/>
+              </a:spcBef>
+              <a:buFont typeface="Arial" panose="020B0604020202020204" pitchFamily="34" charset="0"/>
+              <a:buChar char="•"/>
+              <a:defRPr sz="1800" kern="1200">
+                <a:solidFill>
+                  <a:schemeClr val="tx1"/>
+                </a:solidFill>
+                <a:latin typeface="+mn-lt"/>
+                <a:ea typeface="+mn-ea"/>
+                <a:cs typeface="+mn-cs"/>
+              </a:defRPr>
+            </a:lvl9pPr>
+          </a:lstStyle>
+          <a:p>
+            <a:pPr marL="0" indent="0" algn="just">
+              <a:buNone/>
+            </a:pPr>
+            <a:endParaRPr kumimoji="1" lang="en-PH" altLang="ja-JP" b="1">
+              <a:latin typeface="Times New Roman" panose="02020603050405020304" pitchFamily="18" charset="0"/>
+              <a:ea typeface="Malgun Gothic" panose="020B0503020000020004" pitchFamily="34" charset="-127"/>
+              <a:cs typeface="Times New Roman" panose="02020603050405020304" pitchFamily="18" charset="0"/>
+            </a:endParaRPr>
+          </a:p>
+        </p:txBody>
+      </p:sp>
+      <p:sp>
+        <p:nvSpPr>
+          <p:cNvPr id="62" name="TextBox 6">
+            <a:extLst>
+              <a:ext uri="{FF2B5EF4-FFF2-40B4-BE49-F238E27FC236}">
+                <a16:creationId xmlns:a16="http://schemas.microsoft.com/office/drawing/2014/main" id="{C98369C6-2FB7-70BB-3413-D1D9EB50EA48}"/>
+              </a:ext>
+            </a:extLst>
+          </p:cNvPr>
+          <p:cNvSpPr txBox="1"/>
+          <p:nvPr/>
+        </p:nvSpPr>
+        <p:spPr>
+          <a:xfrm>
+            <a:off x="9109278" y="1277962"/>
+            <a:ext cx="2641401" cy="646331"/>
+          </a:xfrm>
+          <a:prstGeom prst="rect">
+            <a:avLst/>
+          </a:prstGeom>
+          <a:noFill/>
+        </p:spPr>
+        <p:txBody>
+          <a:bodyPr wrap="square" rtlCol="0">
+            <a:spAutoFit/>
+          </a:bodyPr>
+          <a:lstStyle/>
+          <a:p>
+            <a:pPr algn="r"/>
+            <a:r>
+              <a:rPr lang="en-PH" sz="3600" b="1" i="1" dirty="0">
+                <a:latin typeface="Times New Roman" panose="02020603050405020304" pitchFamily="18" charset="0"/>
+                <a:ea typeface="Malgun Gothic" panose="020B0503020000020004" pitchFamily="34" charset="-127"/>
+                <a:cs typeface="Times New Roman" panose="02020603050405020304" pitchFamily="18" charset="0"/>
+              </a:rPr>
+              <a:t>v</a:t>
+            </a:r>
+            <a:r>
+              <a:rPr lang="en-PH" sz="3600" b="1" i="1" baseline="-25000" dirty="0">
+                <a:latin typeface="Times New Roman" panose="02020603050405020304" pitchFamily="18" charset="0"/>
+                <a:ea typeface="Malgun Gothic" panose="020B0503020000020004" pitchFamily="34" charset="-127"/>
+                <a:cs typeface="Times New Roman" panose="02020603050405020304" pitchFamily="18" charset="0"/>
+              </a:rPr>
+              <a:t>in</a:t>
+            </a:r>
+          </a:p>
+        </p:txBody>
+      </p:sp>
+      <p:sp>
+        <p:nvSpPr>
+          <p:cNvPr id="63" name="TextBox 7">
+            <a:extLst>
+              <a:ext uri="{FF2B5EF4-FFF2-40B4-BE49-F238E27FC236}">
+                <a16:creationId xmlns:a16="http://schemas.microsoft.com/office/drawing/2014/main" id="{13616A51-7D9C-8E1B-6AED-6E4723057B67}"/>
+              </a:ext>
+            </a:extLst>
+          </p:cNvPr>
+          <p:cNvSpPr txBox="1"/>
+          <p:nvPr/>
+        </p:nvSpPr>
+        <p:spPr>
+          <a:xfrm>
+            <a:off x="9109278" y="2672856"/>
+            <a:ext cx="2641401" cy="646331"/>
+          </a:xfrm>
+          <a:prstGeom prst="rect">
+            <a:avLst/>
+          </a:prstGeom>
+          <a:noFill/>
+        </p:spPr>
+        <p:txBody>
+          <a:bodyPr wrap="square" rtlCol="0">
+            <a:spAutoFit/>
+          </a:bodyPr>
+          <a:lstStyle/>
+          <a:p>
+            <a:pPr algn="r"/>
+            <a:r>
+              <a:rPr lang="en-PH" sz="3600" b="1" i="1" dirty="0">
+                <a:solidFill>
+                  <a:srgbClr val="21C2C8"/>
+                </a:solidFill>
+                <a:latin typeface="Times New Roman" panose="02020603050405020304" pitchFamily="18" charset="0"/>
+                <a:ea typeface="Malgun Gothic" panose="020B0503020000020004" pitchFamily="34" charset="-127"/>
+                <a:cs typeface="Times New Roman" panose="02020603050405020304" pitchFamily="18" charset="0"/>
+              </a:rPr>
+              <a:t>V</a:t>
+            </a:r>
+            <a:r>
+              <a:rPr lang="en-PH" sz="3600" b="1" i="1" baseline="-25000" dirty="0">
+                <a:solidFill>
+                  <a:srgbClr val="21C2C8"/>
+                </a:solidFill>
+                <a:latin typeface="Times New Roman" panose="02020603050405020304" pitchFamily="18" charset="0"/>
+                <a:ea typeface="Malgun Gothic" panose="020B0503020000020004" pitchFamily="34" charset="-127"/>
+                <a:cs typeface="Times New Roman" panose="02020603050405020304" pitchFamily="18" charset="0"/>
+              </a:rPr>
+              <a:t>o</a:t>
+            </a:r>
+          </a:p>
+        </p:txBody>
+      </p:sp>
+      <p:sp>
+        <p:nvSpPr>
+          <p:cNvPr id="64" name="TextBox 8">
+            <a:extLst>
+              <a:ext uri="{FF2B5EF4-FFF2-40B4-BE49-F238E27FC236}">
+                <a16:creationId xmlns:a16="http://schemas.microsoft.com/office/drawing/2014/main" id="{AABD7432-582F-B407-D537-94D3469C62FF}"/>
+              </a:ext>
+            </a:extLst>
+          </p:cNvPr>
+          <p:cNvSpPr txBox="1"/>
+          <p:nvPr/>
+        </p:nvSpPr>
+        <p:spPr>
+          <a:xfrm>
+            <a:off x="9247498" y="3633568"/>
+            <a:ext cx="2641401" cy="646331"/>
+          </a:xfrm>
+          <a:prstGeom prst="rect">
+            <a:avLst/>
+          </a:prstGeom>
+          <a:noFill/>
+        </p:spPr>
+        <p:txBody>
+          <a:bodyPr wrap="square" rtlCol="0">
+            <a:spAutoFit/>
+          </a:bodyPr>
+          <a:lstStyle/>
+          <a:p>
+            <a:pPr algn="r"/>
+            <a:r>
+              <a:rPr lang="en-PH" sz="3600" b="1" i="1" dirty="0">
+                <a:solidFill>
+                  <a:srgbClr val="E83154"/>
+                </a:solidFill>
+                <a:latin typeface="Times New Roman" panose="02020603050405020304" pitchFamily="18" charset="0"/>
+                <a:ea typeface="Malgun Gothic" panose="020B0503020000020004" pitchFamily="34" charset="-127"/>
+                <a:cs typeface="Times New Roman" panose="02020603050405020304" pitchFamily="18" charset="0"/>
+              </a:rPr>
+              <a:t>v</a:t>
+            </a:r>
+            <a:r>
+              <a:rPr lang="en-PH" sz="3600" b="1" i="1" baseline="-25000" dirty="0">
+                <a:solidFill>
+                  <a:srgbClr val="E83154"/>
+                </a:solidFill>
+                <a:latin typeface="Times New Roman" panose="02020603050405020304" pitchFamily="18" charset="0"/>
+                <a:ea typeface="Malgun Gothic" panose="020B0503020000020004" pitchFamily="34" charset="-127"/>
+                <a:cs typeface="Times New Roman" panose="02020603050405020304" pitchFamily="18" charset="0"/>
+              </a:rPr>
+              <a:t>ds</a:t>
+            </a:r>
+            <a:r>
+              <a:rPr lang="en-PH" sz="3600" b="1" baseline="-25000" dirty="0">
+                <a:solidFill>
+                  <a:srgbClr val="E83154"/>
+                </a:solidFill>
+                <a:latin typeface="Times New Roman" panose="02020603050405020304" pitchFamily="18" charset="0"/>
+                <a:ea typeface="Malgun Gothic" panose="020B0503020000020004" pitchFamily="34" charset="-127"/>
+                <a:cs typeface="Times New Roman" panose="02020603050405020304" pitchFamily="18" charset="0"/>
+              </a:rPr>
+              <a:t>1,</a:t>
+            </a:r>
+            <a:r>
+              <a:rPr lang="en-PH" sz="3600" b="1" dirty="0">
+                <a:solidFill>
+                  <a:srgbClr val="E83154"/>
+                </a:solidFill>
+                <a:latin typeface="Times New Roman" panose="02020603050405020304" pitchFamily="18" charset="0"/>
+                <a:ea typeface="Malgun Gothic" panose="020B0503020000020004" pitchFamily="34" charset="-127"/>
+                <a:cs typeface="Times New Roman" panose="02020603050405020304" pitchFamily="18" charset="0"/>
+              </a:rPr>
+              <a:t> </a:t>
+            </a:r>
+            <a:r>
+              <a:rPr lang="en-PH" sz="3600" b="1" i="1" dirty="0">
+                <a:solidFill>
+                  <a:srgbClr val="93CF33"/>
+                </a:solidFill>
+                <a:latin typeface="Times New Roman" panose="02020603050405020304" pitchFamily="18" charset="0"/>
+                <a:ea typeface="Malgun Gothic" panose="020B0503020000020004" pitchFamily="34" charset="-127"/>
+                <a:cs typeface="Times New Roman" panose="02020603050405020304" pitchFamily="18" charset="0"/>
+              </a:rPr>
+              <a:t>v</a:t>
+            </a:r>
+            <a:r>
+              <a:rPr lang="en-PH" sz="3600" b="1" i="1" baseline="-25000" dirty="0">
+                <a:solidFill>
+                  <a:srgbClr val="93CF33"/>
+                </a:solidFill>
+                <a:latin typeface="Times New Roman" panose="02020603050405020304" pitchFamily="18" charset="0"/>
+                <a:ea typeface="Malgun Gothic" panose="020B0503020000020004" pitchFamily="34" charset="-127"/>
+                <a:cs typeface="Times New Roman" panose="02020603050405020304" pitchFamily="18" charset="0"/>
+              </a:rPr>
+              <a:t>ds</a:t>
+            </a:r>
+            <a:r>
+              <a:rPr lang="en-PH" sz="3600" b="1" baseline="-25000" dirty="0">
+                <a:solidFill>
+                  <a:srgbClr val="93CF33"/>
+                </a:solidFill>
+                <a:latin typeface="Times New Roman" panose="02020603050405020304" pitchFamily="18" charset="0"/>
+                <a:ea typeface="Malgun Gothic" panose="020B0503020000020004" pitchFamily="34" charset="-127"/>
+                <a:cs typeface="Times New Roman" panose="02020603050405020304" pitchFamily="18" charset="0"/>
+              </a:rPr>
+              <a:t>2</a:t>
+            </a:r>
+          </a:p>
+        </p:txBody>
+      </p:sp>
+      <p:sp>
+        <p:nvSpPr>
+          <p:cNvPr id="65" name="TextBox 9">
+            <a:extLst>
+              <a:ext uri="{FF2B5EF4-FFF2-40B4-BE49-F238E27FC236}">
+                <a16:creationId xmlns:a16="http://schemas.microsoft.com/office/drawing/2014/main" id="{59248999-2840-57FB-DC1A-6E3EB6E98AA5}"/>
+              </a:ext>
+            </a:extLst>
+          </p:cNvPr>
+          <p:cNvSpPr txBox="1"/>
+          <p:nvPr/>
+        </p:nvSpPr>
+        <p:spPr>
+          <a:xfrm>
+            <a:off x="9369479" y="4976374"/>
+            <a:ext cx="2542843" cy="646331"/>
+          </a:xfrm>
+          <a:prstGeom prst="rect">
+            <a:avLst/>
+          </a:prstGeom>
+          <a:noFill/>
+        </p:spPr>
+        <p:txBody>
+          <a:bodyPr wrap="square" rtlCol="0">
+            <a:spAutoFit/>
+          </a:bodyPr>
+          <a:lstStyle/>
+          <a:p>
+            <a:pPr algn="r"/>
+            <a:r>
+              <a:rPr lang="en-PH" sz="3600" b="1" i="1" dirty="0">
+                <a:solidFill>
+                  <a:srgbClr val="FD9116"/>
+                </a:solidFill>
+                <a:latin typeface="Times New Roman" panose="02020603050405020304" pitchFamily="18" charset="0"/>
+                <a:ea typeface="Malgun Gothic" panose="020B0503020000020004" pitchFamily="34" charset="-127"/>
+                <a:cs typeface="Times New Roman" panose="02020603050405020304" pitchFamily="18" charset="0"/>
+              </a:rPr>
+              <a:t>i</a:t>
+            </a:r>
+            <a:r>
+              <a:rPr lang="en-PH" sz="3600" b="1" i="1" baseline="-25000" dirty="0">
+                <a:solidFill>
+                  <a:srgbClr val="FD9116"/>
+                </a:solidFill>
+                <a:latin typeface="Times New Roman" panose="02020603050405020304" pitchFamily="18" charset="0"/>
+                <a:ea typeface="Malgun Gothic" panose="020B0503020000020004" pitchFamily="34" charset="-127"/>
+                <a:cs typeface="Times New Roman" panose="02020603050405020304" pitchFamily="18" charset="0"/>
+              </a:rPr>
+              <a:t>S</a:t>
+            </a:r>
+            <a:r>
+              <a:rPr lang="en-PH" sz="3600" b="1" baseline="-25000" dirty="0">
+                <a:solidFill>
+                  <a:srgbClr val="FD9116"/>
+                </a:solidFill>
+                <a:latin typeface="Times New Roman" panose="02020603050405020304" pitchFamily="18" charset="0"/>
+                <a:ea typeface="Malgun Gothic" panose="020B0503020000020004" pitchFamily="34" charset="-127"/>
+                <a:cs typeface="Times New Roman" panose="02020603050405020304" pitchFamily="18" charset="0"/>
+              </a:rPr>
+              <a:t>1</a:t>
+            </a:r>
+            <a:r>
+              <a:rPr lang="en-PH" sz="3600" b="1" baseline="-25000" dirty="0">
+                <a:latin typeface="Times New Roman" panose="02020603050405020304" pitchFamily="18" charset="0"/>
+                <a:ea typeface="Malgun Gothic" panose="020B0503020000020004" pitchFamily="34" charset="-127"/>
+                <a:cs typeface="Times New Roman" panose="02020603050405020304" pitchFamily="18" charset="0"/>
+              </a:rPr>
+              <a:t>,</a:t>
+            </a:r>
+            <a:r>
+              <a:rPr lang="en-PH" sz="3600" b="1" dirty="0">
+                <a:solidFill>
+                  <a:srgbClr val="E83154"/>
+                </a:solidFill>
+                <a:latin typeface="Times New Roman" panose="02020603050405020304" pitchFamily="18" charset="0"/>
+                <a:ea typeface="Malgun Gothic" panose="020B0503020000020004" pitchFamily="34" charset="-127"/>
+                <a:cs typeface="Times New Roman" panose="02020603050405020304" pitchFamily="18" charset="0"/>
+              </a:rPr>
+              <a:t> </a:t>
+            </a:r>
+            <a:r>
+              <a:rPr lang="en-PH" sz="3600" b="1" i="1" dirty="0">
+                <a:solidFill>
+                  <a:srgbClr val="2424B7"/>
+                </a:solidFill>
+                <a:latin typeface="Times New Roman" panose="02020603050405020304" pitchFamily="18" charset="0"/>
+                <a:ea typeface="Malgun Gothic" panose="020B0503020000020004" pitchFamily="34" charset="-127"/>
+                <a:cs typeface="Times New Roman" panose="02020603050405020304" pitchFamily="18" charset="0"/>
+              </a:rPr>
+              <a:t>i</a:t>
+            </a:r>
+            <a:r>
+              <a:rPr lang="en-PH" sz="3600" b="1" i="1" baseline="-25000" dirty="0">
+                <a:solidFill>
+                  <a:srgbClr val="2424B7"/>
+                </a:solidFill>
+                <a:latin typeface="Times New Roman" panose="02020603050405020304" pitchFamily="18" charset="0"/>
+                <a:ea typeface="Malgun Gothic" panose="020B0503020000020004" pitchFamily="34" charset="-127"/>
+                <a:cs typeface="Times New Roman" panose="02020603050405020304" pitchFamily="18" charset="0"/>
+              </a:rPr>
+              <a:t>S</a:t>
+            </a:r>
+            <a:r>
+              <a:rPr lang="en-PH" sz="3600" b="1" baseline="-25000" dirty="0">
+                <a:solidFill>
+                  <a:srgbClr val="2424B7"/>
+                </a:solidFill>
+                <a:latin typeface="Times New Roman" panose="02020603050405020304" pitchFamily="18" charset="0"/>
+                <a:ea typeface="Malgun Gothic" panose="020B0503020000020004" pitchFamily="34" charset="-127"/>
+                <a:cs typeface="Times New Roman" panose="02020603050405020304" pitchFamily="18" charset="0"/>
+              </a:rPr>
+              <a:t>2</a:t>
+            </a:r>
+          </a:p>
+        </p:txBody>
+      </p:sp>
+      <p:sp>
+        <p:nvSpPr>
+          <p:cNvPr id="66" name="TextBox 10">
+            <a:extLst>
+              <a:ext uri="{FF2B5EF4-FFF2-40B4-BE49-F238E27FC236}">
+                <a16:creationId xmlns:a16="http://schemas.microsoft.com/office/drawing/2014/main" id="{6CFD1901-2E2B-043F-1262-4A51A40931DD}"/>
+              </a:ext>
+            </a:extLst>
+          </p:cNvPr>
+          <p:cNvSpPr txBox="1"/>
+          <p:nvPr/>
+        </p:nvSpPr>
+        <p:spPr>
+          <a:xfrm>
+            <a:off x="9391917" y="6379198"/>
+            <a:ext cx="2496981" cy="646331"/>
+          </a:xfrm>
+          <a:prstGeom prst="rect">
+            <a:avLst/>
+          </a:prstGeom>
+          <a:noFill/>
+        </p:spPr>
+        <p:txBody>
+          <a:bodyPr wrap="square" rtlCol="0">
+            <a:spAutoFit/>
+          </a:bodyPr>
+          <a:lstStyle/>
+          <a:p>
+            <a:pPr algn="r"/>
+            <a:r>
+              <a:rPr lang="en-PH" sz="3600" b="1" i="1" dirty="0">
+                <a:solidFill>
+                  <a:srgbClr val="D8469D"/>
+                </a:solidFill>
+                <a:latin typeface="Times New Roman" panose="02020603050405020304" pitchFamily="18" charset="0"/>
+                <a:ea typeface="Malgun Gothic" panose="020B0503020000020004" pitchFamily="34" charset="-127"/>
+                <a:cs typeface="Times New Roman" panose="02020603050405020304" pitchFamily="18" charset="0"/>
+              </a:rPr>
+              <a:t>i</a:t>
+            </a:r>
+            <a:r>
+              <a:rPr lang="en-PH" sz="3600" b="1" i="1" baseline="-25000" dirty="0">
+                <a:solidFill>
+                  <a:srgbClr val="D8469D"/>
+                </a:solidFill>
+                <a:latin typeface="Times New Roman" panose="02020603050405020304" pitchFamily="18" charset="0"/>
+                <a:ea typeface="Malgun Gothic" panose="020B0503020000020004" pitchFamily="34" charset="-127"/>
+                <a:cs typeface="Times New Roman" panose="02020603050405020304" pitchFamily="18" charset="0"/>
+              </a:rPr>
+              <a:t>D</a:t>
+            </a:r>
+            <a:r>
+              <a:rPr lang="en-PH" sz="3600" b="1" baseline="-25000" dirty="0">
+                <a:solidFill>
+                  <a:srgbClr val="D8469D"/>
+                </a:solidFill>
+                <a:latin typeface="Times New Roman" panose="02020603050405020304" pitchFamily="18" charset="0"/>
+                <a:ea typeface="Malgun Gothic" panose="020B0503020000020004" pitchFamily="34" charset="-127"/>
+                <a:cs typeface="Times New Roman" panose="02020603050405020304" pitchFamily="18" charset="0"/>
+              </a:rPr>
+              <a:t>1</a:t>
+            </a:r>
+            <a:r>
+              <a:rPr lang="en-PH" sz="3600" b="1" baseline="-25000" dirty="0">
+                <a:latin typeface="Times New Roman" panose="02020603050405020304" pitchFamily="18" charset="0"/>
+                <a:ea typeface="Malgun Gothic" panose="020B0503020000020004" pitchFamily="34" charset="-127"/>
+                <a:cs typeface="Times New Roman" panose="02020603050405020304" pitchFamily="18" charset="0"/>
+              </a:rPr>
+              <a:t>,</a:t>
+            </a:r>
+            <a:r>
+              <a:rPr lang="en-PH" sz="3600" b="1" dirty="0">
+                <a:solidFill>
+                  <a:srgbClr val="E83154"/>
+                </a:solidFill>
+                <a:latin typeface="Times New Roman" panose="02020603050405020304" pitchFamily="18" charset="0"/>
+                <a:ea typeface="Malgun Gothic" panose="020B0503020000020004" pitchFamily="34" charset="-127"/>
+                <a:cs typeface="Times New Roman" panose="02020603050405020304" pitchFamily="18" charset="0"/>
+              </a:rPr>
+              <a:t> </a:t>
+            </a:r>
+            <a:r>
+              <a:rPr lang="en-PH" sz="3600" b="1" i="1" dirty="0">
+                <a:solidFill>
+                  <a:srgbClr val="01D995"/>
+                </a:solidFill>
+                <a:latin typeface="Times New Roman" panose="02020603050405020304" pitchFamily="18" charset="0"/>
+                <a:ea typeface="Malgun Gothic" panose="020B0503020000020004" pitchFamily="34" charset="-127"/>
+                <a:cs typeface="Times New Roman" panose="02020603050405020304" pitchFamily="18" charset="0"/>
+              </a:rPr>
+              <a:t>i</a:t>
+            </a:r>
+            <a:r>
+              <a:rPr lang="en-PH" sz="3600" b="1" i="1" baseline="-25000" dirty="0">
+                <a:solidFill>
+                  <a:srgbClr val="01D995"/>
+                </a:solidFill>
+                <a:latin typeface="Times New Roman" panose="02020603050405020304" pitchFamily="18" charset="0"/>
+                <a:ea typeface="Malgun Gothic" panose="020B0503020000020004" pitchFamily="34" charset="-127"/>
+                <a:cs typeface="Times New Roman" panose="02020603050405020304" pitchFamily="18" charset="0"/>
+              </a:rPr>
+              <a:t>D</a:t>
+            </a:r>
+            <a:r>
+              <a:rPr lang="en-PH" sz="3600" b="1" baseline="-25000" dirty="0">
+                <a:solidFill>
+                  <a:srgbClr val="01D995"/>
+                </a:solidFill>
+                <a:latin typeface="Times New Roman" panose="02020603050405020304" pitchFamily="18" charset="0"/>
+                <a:ea typeface="Malgun Gothic" panose="020B0503020000020004" pitchFamily="34" charset="-127"/>
+                <a:cs typeface="Times New Roman" panose="02020603050405020304" pitchFamily="18" charset="0"/>
+              </a:rPr>
+              <a:t>2</a:t>
+            </a:r>
+          </a:p>
+        </p:txBody>
+      </p:sp>
+      <p:cxnSp>
+        <p:nvCxnSpPr>
+          <p:cNvPr id="2" name="Straight Arrow Connector 1">
+            <a:extLst>
+              <a:ext uri="{FF2B5EF4-FFF2-40B4-BE49-F238E27FC236}">
+                <a16:creationId xmlns:a16="http://schemas.microsoft.com/office/drawing/2014/main" id="{DCD0A8EB-A57D-067D-C132-E0997D82A490}"/>
+              </a:ext>
+            </a:extLst>
+          </p:cNvPr>
+          <p:cNvCxnSpPr>
+            <a:cxnSpLocks/>
+          </p:cNvCxnSpPr>
+          <p:nvPr/>
+        </p:nvCxnSpPr>
+        <p:spPr>
+          <a:xfrm>
+            <a:off x="851907" y="2071946"/>
+            <a:ext cx="1267528" cy="0"/>
+          </a:xfrm>
+          <a:prstGeom prst="straightConnector1">
+            <a:avLst/>
+          </a:prstGeom>
+          <a:ln w="38100">
+            <a:solidFill>
+              <a:schemeClr val="tx1"/>
+            </a:solidFill>
+            <a:headEnd type="triangle"/>
+            <a:tailEnd type="triangle"/>
+          </a:ln>
+        </p:spPr>
+        <p:style>
+          <a:lnRef idx="1">
+            <a:schemeClr val="accent1"/>
+          </a:lnRef>
+          <a:fillRef idx="0">
+            <a:schemeClr val="accent1"/>
+          </a:fillRef>
+          <a:effectRef idx="0">
+            <a:schemeClr val="accent1"/>
+          </a:effectRef>
+          <a:fontRef idx="minor">
+            <a:schemeClr val="tx1"/>
+          </a:fontRef>
+        </p:style>
+      </p:cxnSp>
+      <mc:AlternateContent xmlns:mc="http://schemas.openxmlformats.org/markup-compatibility/2006">
+        <mc:Choice xmlns:a14="http://schemas.microsoft.com/office/drawing/2010/main" Requires="a14">
+          <p:sp>
+            <p:nvSpPr>
+              <p:cNvPr id="4" name="TextBox 3">
+                <a:extLst>
+                  <a:ext uri="{FF2B5EF4-FFF2-40B4-BE49-F238E27FC236}">
+                    <a16:creationId xmlns:a16="http://schemas.microsoft.com/office/drawing/2014/main" id="{55761940-F29F-E92B-3952-8614D26580B9}"/>
+                  </a:ext>
+                </a:extLst>
+              </p:cNvPr>
+              <p:cNvSpPr txBox="1"/>
+              <p:nvPr/>
+            </p:nvSpPr>
+            <p:spPr>
+              <a:xfrm>
+                <a:off x="683310" y="1605123"/>
+                <a:ext cx="1572470" cy="461665"/>
+              </a:xfrm>
+              <a:prstGeom prst="rect">
+                <a:avLst/>
+              </a:prstGeom>
+              <a:noFill/>
+            </p:spPr>
+            <p:txBody>
+              <a:bodyPr wrap="square" rtlCol="0">
+                <a:spAutoFit/>
+              </a:bodyPr>
+              <a:lstStyle/>
+              <a:p>
+                <a:pPr algn="ctr"/>
+                <a:r>
+                  <a:rPr lang="en-PH" sz="2400" b="1" dirty="0">
+                    <a:latin typeface="Times New Roman" panose="02020603050405020304" pitchFamily="18" charset="0"/>
+                    <a:ea typeface="Malgun Gothic" panose="020B0503020000020004" pitchFamily="34" charset="-127"/>
+                    <a:cs typeface="Times New Roman" panose="02020603050405020304" pitchFamily="18" charset="0"/>
+                  </a:rPr>
+                  <a:t>4 </a:t>
+                </a:r>
+                <a14:m>
+                  <m:oMath xmlns:m="http://schemas.openxmlformats.org/officeDocument/2006/math">
+                    <m:r>
+                      <a:rPr lang="en-US" sz="2400" b="1" i="1" smtClean="0">
+                        <a:latin typeface="Cambria Math" panose="02040503050406030204" pitchFamily="18" charset="0"/>
+                        <a:ea typeface="Malgun Gothic" panose="020B0503020000020004" pitchFamily="34" charset="-127"/>
+                        <a:cs typeface="Times New Roman" panose="02020603050405020304" pitchFamily="18" charset="0"/>
+                      </a:rPr>
+                      <m:t>𝝁</m:t>
+                    </m:r>
+                  </m:oMath>
+                </a14:m>
+                <a:r>
+                  <a:rPr lang="en-PH" sz="2400" b="1" dirty="0">
+                    <a:latin typeface="Times New Roman" panose="02020603050405020304" pitchFamily="18" charset="0"/>
+                    <a:ea typeface="Malgun Gothic" panose="020B0503020000020004" pitchFamily="34" charset="-127"/>
+                    <a:cs typeface="Times New Roman" panose="02020603050405020304" pitchFamily="18" charset="0"/>
+                  </a:rPr>
+                  <a:t>s/div.</a:t>
+                </a:r>
+                <a:endParaRPr lang="en-PH" sz="2400" b="1" baseline="-25000" dirty="0">
+                  <a:latin typeface="Times New Roman" panose="02020603050405020304" pitchFamily="18" charset="0"/>
+                  <a:ea typeface="Malgun Gothic" panose="020B0503020000020004" pitchFamily="34" charset="-127"/>
+                  <a:cs typeface="Times New Roman" panose="02020603050405020304" pitchFamily="18" charset="0"/>
+                </a:endParaRPr>
+              </a:p>
+            </p:txBody>
+          </p:sp>
+        </mc:Choice>
+        <mc:Fallback>
+          <p:sp>
+            <p:nvSpPr>
+              <p:cNvPr id="4" name="TextBox 3">
+                <a:extLst>
+                  <a:ext uri="{FF2B5EF4-FFF2-40B4-BE49-F238E27FC236}">
+                    <a16:creationId xmlns:a16="http://schemas.microsoft.com/office/drawing/2014/main" id="{55761940-F29F-E92B-3952-8614D26580B9}"/>
+                  </a:ext>
+                </a:extLst>
+              </p:cNvPr>
+              <p:cNvSpPr txBox="1">
+                <a:spLocks noRot="1" noChangeAspect="1" noMove="1" noResize="1" noEditPoints="1" noAdjustHandles="1" noChangeArrowheads="1" noChangeShapeType="1" noTextEdit="1"/>
+              </p:cNvSpPr>
+              <p:nvPr/>
+            </p:nvSpPr>
+            <p:spPr>
+              <a:xfrm>
+                <a:off x="683310" y="1605123"/>
+                <a:ext cx="1572470" cy="461665"/>
+              </a:xfrm>
+              <a:prstGeom prst="rect">
+                <a:avLst/>
+              </a:prstGeom>
+              <a:blipFill>
+                <a:blip r:embed="rId3"/>
+                <a:stretch>
+                  <a:fillRect t="-10526" b="-28947"/>
+                </a:stretch>
+              </a:blipFill>
+            </p:spPr>
+            <p:txBody>
+              <a:bodyPr/>
+              <a:lstStyle/>
+              <a:p>
+                <a:r>
+                  <a:rPr lang="en-US">
+                    <a:noFill/>
+                  </a:rPr>
+                  <a:t> </a:t>
+                </a:r>
+              </a:p>
+            </p:txBody>
+          </p:sp>
+        </mc:Fallback>
+      </mc:AlternateContent>
+    </p:spTree>
+    <p:extLst>
+      <p:ext uri="{BB962C8B-B14F-4D97-AF65-F5344CB8AC3E}">
+        <p14:creationId xmlns:p14="http://schemas.microsoft.com/office/powerpoint/2010/main" val="1877996515"/>
       </p:ext>
     </p:extLst>
   </p:cSld>
@@ -7386,8 +8267,8 @@
           </a:fontRef>
         </p:style>
       </p:cxnSp>
-      <mc:AlternateContent xmlns:mc="http://schemas.openxmlformats.org/markup-compatibility/2006">
-        <mc:Choice xmlns:a14="http://schemas.microsoft.com/office/drawing/2010/main" Requires="a14">
+      <mc:AlternateContent xmlns:mc="http://schemas.openxmlformats.org/markup-compatibility/2006" xmlns:a14="http://schemas.microsoft.com/office/drawing/2010/main">
+        <mc:Choice Requires="a14">
           <p:sp>
             <p:nvSpPr>
               <p:cNvPr id="7" name="TextBox 6">
@@ -7454,7 +8335,7 @@
             </p:txBody>
           </p:sp>
         </mc:Choice>
-        <mc:Fallback>
+        <mc:Fallback xmlns="">
           <p:sp>
             <p:nvSpPr>
               <p:cNvPr id="7" name="TextBox 6">
@@ -8649,6 +9530,1575 @@
 </file>
 
 <file path=ppt/slides/slide4.xml><?xml version="1.0" encoding="utf-8"?>
+<p:sld xmlns:a="http://schemas.openxmlformats.org/drawingml/2006/main" xmlns:r="http://schemas.openxmlformats.org/officeDocument/2006/relationships" xmlns:p="http://schemas.openxmlformats.org/presentationml/2006/main" show="0">
+  <p:cSld>
+    <p:spTree>
+      <p:nvGrpSpPr>
+        <p:cNvPr id="1" name="">
+          <a:extLst>
+            <a:ext uri="{FF2B5EF4-FFF2-40B4-BE49-F238E27FC236}">
+              <a16:creationId xmlns:a16="http://schemas.microsoft.com/office/drawing/2014/main" id="{829565C4-C3F2-03E9-A159-E16428ADD03B}"/>
+            </a:ext>
+          </a:extLst>
+        </p:cNvPr>
+        <p:cNvGrpSpPr/>
+        <p:nvPr/>
+      </p:nvGrpSpPr>
+      <p:grpSpPr>
+        <a:xfrm>
+          <a:off x="0" y="0"/>
+          <a:ext cx="0" cy="0"/>
+          <a:chOff x="0" y="0"/>
+          <a:chExt cx="0" cy="0"/>
+        </a:xfrm>
+      </p:grpSpPr>
+      <p:pic>
+        <p:nvPicPr>
+          <p:cNvPr id="3" name="Picture 2" descr="The provided text appears to be a list of electrical measurements and values, possibly from a multimeter or oscilloscope display. It includes voltage readings (V), current readings (A), and possibly other units such as milliamperes (mA) and picofarads (pF). The data seems to be organized in a tabular format, with different labels such as C1, C2, C5, and C8, which could indicate different channels or components being tested.&#10;&#10;AI-generated content may be incorrect.">
+            <a:extLst>
+              <a:ext uri="{FF2B5EF4-FFF2-40B4-BE49-F238E27FC236}">
+                <a16:creationId xmlns:a16="http://schemas.microsoft.com/office/drawing/2014/main" id="{3CE9F478-C16F-4A39-D3C6-9E626898B47D}"/>
+              </a:ext>
+            </a:extLst>
+          </p:cNvPr>
+          <p:cNvPicPr>
+            <a:picLocks noChangeAspect="1"/>
+          </p:cNvPicPr>
+          <p:nvPr/>
+        </p:nvPicPr>
+        <p:blipFill>
+          <a:blip r:embed="rId2">
+            <a:extLst>
+              <a:ext uri="{28A0092B-C50C-407E-A947-70E740481C1C}">
+                <a14:useLocalDpi xmlns:a14="http://schemas.microsoft.com/office/drawing/2010/main" val="0"/>
+              </a:ext>
+            </a:extLst>
+          </a:blip>
+          <a:stretch>
+            <a:fillRect/>
+          </a:stretch>
+        </p:blipFill>
+        <p:spPr>
+          <a:xfrm>
+            <a:off x="0" y="1101032"/>
+            <a:ext cx="12085320" cy="6806473"/>
+          </a:xfrm>
+          <a:prstGeom prst="rect">
+            <a:avLst/>
+          </a:prstGeom>
+        </p:spPr>
+      </p:pic>
+      <p:sp>
+        <p:nvSpPr>
+          <p:cNvPr id="5" name="テキスト プレースホルダー 2">
+            <a:extLst>
+              <a:ext uri="{FF2B5EF4-FFF2-40B4-BE49-F238E27FC236}">
+                <a16:creationId xmlns:a16="http://schemas.microsoft.com/office/drawing/2014/main" id="{A8797864-402A-7EE7-E40D-5535B56C819E}"/>
+              </a:ext>
+            </a:extLst>
+          </p:cNvPr>
+          <p:cNvSpPr txBox="1">
+            <a:spLocks/>
+          </p:cNvSpPr>
+          <p:nvPr/>
+        </p:nvSpPr>
+        <p:spPr>
+          <a:xfrm>
+            <a:off x="350158" y="2242209"/>
+            <a:ext cx="6736442" cy="4964949"/>
+          </a:xfrm>
+          <a:prstGeom prst="rect">
+            <a:avLst/>
+          </a:prstGeom>
+        </p:spPr>
+        <p:txBody>
+          <a:bodyPr vert="horz" lIns="91440" tIns="45720" rIns="91440" bIns="45720" numCol="1" spcCol="828000" rtlCol="0">
+            <a:normAutofit/>
+          </a:bodyPr>
+          <a:lstStyle>
+            <a:lvl1pPr marL="228600" indent="-228600" algn="l" defTabSz="914400" rtl="0" eaLnBrk="1" latinLnBrk="0" hangingPunct="1">
+              <a:lnSpc>
+                <a:spcPct val="90000"/>
+              </a:lnSpc>
+              <a:spcBef>
+                <a:spcPts val="1000"/>
+              </a:spcBef>
+              <a:buFont typeface="Arial" panose="020B0604020202020204" pitchFamily="34" charset="0"/>
+              <a:buChar char="•"/>
+              <a:defRPr sz="2800" kern="1200">
+                <a:solidFill>
+                  <a:schemeClr val="tx1"/>
+                </a:solidFill>
+                <a:latin typeface="+mn-lt"/>
+                <a:ea typeface="+mn-ea"/>
+                <a:cs typeface="+mn-cs"/>
+              </a:defRPr>
+            </a:lvl1pPr>
+            <a:lvl2pPr marL="685800" indent="-228600" algn="l" defTabSz="914400" rtl="0" eaLnBrk="1" latinLnBrk="0" hangingPunct="1">
+              <a:lnSpc>
+                <a:spcPct val="90000"/>
+              </a:lnSpc>
+              <a:spcBef>
+                <a:spcPts val="500"/>
+              </a:spcBef>
+              <a:buFont typeface="Arial" panose="020B0604020202020204" pitchFamily="34" charset="0"/>
+              <a:buChar char="•"/>
+              <a:defRPr sz="2400" kern="1200">
+                <a:solidFill>
+                  <a:schemeClr val="tx1"/>
+                </a:solidFill>
+                <a:latin typeface="+mn-lt"/>
+                <a:ea typeface="+mn-ea"/>
+                <a:cs typeface="+mn-cs"/>
+              </a:defRPr>
+            </a:lvl2pPr>
+            <a:lvl3pPr marL="1143000" indent="-228600" algn="l" defTabSz="914400" rtl="0" eaLnBrk="1" latinLnBrk="0" hangingPunct="1">
+              <a:lnSpc>
+                <a:spcPct val="90000"/>
+              </a:lnSpc>
+              <a:spcBef>
+                <a:spcPts val="500"/>
+              </a:spcBef>
+              <a:buFont typeface="Arial" panose="020B0604020202020204" pitchFamily="34" charset="0"/>
+              <a:buChar char="•"/>
+              <a:defRPr sz="2000" kern="1200">
+                <a:solidFill>
+                  <a:schemeClr val="tx1"/>
+                </a:solidFill>
+                <a:latin typeface="+mn-lt"/>
+                <a:ea typeface="+mn-ea"/>
+                <a:cs typeface="+mn-cs"/>
+              </a:defRPr>
+            </a:lvl3pPr>
+            <a:lvl4pPr marL="1600200" indent="-228600" algn="l" defTabSz="914400" rtl="0" eaLnBrk="1" latinLnBrk="0" hangingPunct="1">
+              <a:lnSpc>
+                <a:spcPct val="90000"/>
+              </a:lnSpc>
+              <a:spcBef>
+                <a:spcPts val="500"/>
+              </a:spcBef>
+              <a:buFont typeface="Arial" panose="020B0604020202020204" pitchFamily="34" charset="0"/>
+              <a:buChar char="•"/>
+              <a:defRPr sz="1800" kern="1200">
+                <a:solidFill>
+                  <a:schemeClr val="tx1"/>
+                </a:solidFill>
+                <a:latin typeface="+mn-lt"/>
+                <a:ea typeface="+mn-ea"/>
+                <a:cs typeface="+mn-cs"/>
+              </a:defRPr>
+            </a:lvl4pPr>
+            <a:lvl5pPr marL="2057400" indent="-228600" algn="l" defTabSz="914400" rtl="0" eaLnBrk="1" latinLnBrk="0" hangingPunct="1">
+              <a:lnSpc>
+                <a:spcPct val="90000"/>
+              </a:lnSpc>
+              <a:spcBef>
+                <a:spcPts val="500"/>
+              </a:spcBef>
+              <a:buFont typeface="Arial" panose="020B0604020202020204" pitchFamily="34" charset="0"/>
+              <a:buChar char="•"/>
+              <a:defRPr sz="1800" kern="1200">
+                <a:solidFill>
+                  <a:schemeClr val="tx1"/>
+                </a:solidFill>
+                <a:latin typeface="+mn-lt"/>
+                <a:ea typeface="+mn-ea"/>
+                <a:cs typeface="+mn-cs"/>
+              </a:defRPr>
+            </a:lvl5pPr>
+            <a:lvl6pPr marL="2514600" indent="-228600" algn="l" defTabSz="914400" rtl="0" eaLnBrk="1" latinLnBrk="0" hangingPunct="1">
+              <a:lnSpc>
+                <a:spcPct val="90000"/>
+              </a:lnSpc>
+              <a:spcBef>
+                <a:spcPts val="500"/>
+              </a:spcBef>
+              <a:buFont typeface="Arial" panose="020B0604020202020204" pitchFamily="34" charset="0"/>
+              <a:buChar char="•"/>
+              <a:defRPr sz="1800" kern="1200">
+                <a:solidFill>
+                  <a:schemeClr val="tx1"/>
+                </a:solidFill>
+                <a:latin typeface="+mn-lt"/>
+                <a:ea typeface="+mn-ea"/>
+                <a:cs typeface="+mn-cs"/>
+              </a:defRPr>
+            </a:lvl6pPr>
+            <a:lvl7pPr marL="2971800" indent="-228600" algn="l" defTabSz="914400" rtl="0" eaLnBrk="1" latinLnBrk="0" hangingPunct="1">
+              <a:lnSpc>
+                <a:spcPct val="90000"/>
+              </a:lnSpc>
+              <a:spcBef>
+                <a:spcPts val="500"/>
+              </a:spcBef>
+              <a:buFont typeface="Arial" panose="020B0604020202020204" pitchFamily="34" charset="0"/>
+              <a:buChar char="•"/>
+              <a:defRPr sz="1800" kern="1200">
+                <a:solidFill>
+                  <a:schemeClr val="tx1"/>
+                </a:solidFill>
+                <a:latin typeface="+mn-lt"/>
+                <a:ea typeface="+mn-ea"/>
+                <a:cs typeface="+mn-cs"/>
+              </a:defRPr>
+            </a:lvl7pPr>
+            <a:lvl8pPr marL="3429000" indent="-228600" algn="l" defTabSz="914400" rtl="0" eaLnBrk="1" latinLnBrk="0" hangingPunct="1">
+              <a:lnSpc>
+                <a:spcPct val="90000"/>
+              </a:lnSpc>
+              <a:spcBef>
+                <a:spcPts val="500"/>
+              </a:spcBef>
+              <a:buFont typeface="Arial" panose="020B0604020202020204" pitchFamily="34" charset="0"/>
+              <a:buChar char="•"/>
+              <a:defRPr sz="1800" kern="1200">
+                <a:solidFill>
+                  <a:schemeClr val="tx1"/>
+                </a:solidFill>
+                <a:latin typeface="+mn-lt"/>
+                <a:ea typeface="+mn-ea"/>
+                <a:cs typeface="+mn-cs"/>
+              </a:defRPr>
+            </a:lvl8pPr>
+            <a:lvl9pPr marL="3886200" indent="-228600" algn="l" defTabSz="914400" rtl="0" eaLnBrk="1" latinLnBrk="0" hangingPunct="1">
+              <a:lnSpc>
+                <a:spcPct val="90000"/>
+              </a:lnSpc>
+              <a:spcBef>
+                <a:spcPts val="500"/>
+              </a:spcBef>
+              <a:buFont typeface="Arial" panose="020B0604020202020204" pitchFamily="34" charset="0"/>
+              <a:buChar char="•"/>
+              <a:defRPr sz="1800" kern="1200">
+                <a:solidFill>
+                  <a:schemeClr val="tx1"/>
+                </a:solidFill>
+                <a:latin typeface="+mn-lt"/>
+                <a:ea typeface="+mn-ea"/>
+                <a:cs typeface="+mn-cs"/>
+              </a:defRPr>
+            </a:lvl9pPr>
+          </a:lstStyle>
+          <a:p>
+            <a:pPr marL="0" indent="0" algn="just">
+              <a:buNone/>
+            </a:pPr>
+            <a:endParaRPr kumimoji="1" lang="en-PH" altLang="ja-JP" b="1">
+              <a:latin typeface="Arial" panose="020B0604020202020204" pitchFamily="34" charset="0"/>
+              <a:ea typeface="Malgun Gothic" panose="020B0503020000020004" pitchFamily="34" charset="-127"/>
+              <a:cs typeface="Arial" panose="020B0604020202020204" pitchFamily="34" charset="0"/>
+            </a:endParaRPr>
+          </a:p>
+        </p:txBody>
+      </p:sp>
+      <p:cxnSp>
+        <p:nvCxnSpPr>
+          <p:cNvPr id="6" name="Straight Arrow Connector 5">
+            <a:extLst>
+              <a:ext uri="{FF2B5EF4-FFF2-40B4-BE49-F238E27FC236}">
+                <a16:creationId xmlns:a16="http://schemas.microsoft.com/office/drawing/2014/main" id="{728F9A60-ABE8-D822-0378-7CDC730D6080}"/>
+              </a:ext>
+            </a:extLst>
+          </p:cNvPr>
+          <p:cNvCxnSpPr>
+            <a:cxnSpLocks/>
+          </p:cNvCxnSpPr>
+          <p:nvPr/>
+        </p:nvCxnSpPr>
+        <p:spPr>
+          <a:xfrm>
+            <a:off x="747132" y="2071946"/>
+            <a:ext cx="1267528" cy="0"/>
+          </a:xfrm>
+          <a:prstGeom prst="straightConnector1">
+            <a:avLst/>
+          </a:prstGeom>
+          <a:ln w="38100">
+            <a:solidFill>
+              <a:schemeClr val="tx1"/>
+            </a:solidFill>
+            <a:headEnd type="triangle"/>
+            <a:tailEnd type="triangle"/>
+          </a:ln>
+        </p:spPr>
+        <p:style>
+          <a:lnRef idx="1">
+            <a:schemeClr val="accent1"/>
+          </a:lnRef>
+          <a:fillRef idx="0">
+            <a:schemeClr val="accent1"/>
+          </a:fillRef>
+          <a:effectRef idx="0">
+            <a:schemeClr val="accent1"/>
+          </a:effectRef>
+          <a:fontRef idx="minor">
+            <a:schemeClr val="tx1"/>
+          </a:fontRef>
+        </p:style>
+      </p:cxnSp>
+      <mc:AlternateContent xmlns:mc="http://schemas.openxmlformats.org/markup-compatibility/2006">
+        <mc:Choice xmlns:a14="http://schemas.microsoft.com/office/drawing/2010/main" Requires="a14">
+          <p:sp>
+            <p:nvSpPr>
+              <p:cNvPr id="7" name="TextBox 6">
+                <a:extLst>
+                  <a:ext uri="{FF2B5EF4-FFF2-40B4-BE49-F238E27FC236}">
+                    <a16:creationId xmlns:a16="http://schemas.microsoft.com/office/drawing/2014/main" id="{7FE58045-ADB0-979F-6AF6-857429A0B271}"/>
+                  </a:ext>
+                </a:extLst>
+              </p:cNvPr>
+              <p:cNvSpPr txBox="1"/>
+              <p:nvPr/>
+            </p:nvSpPr>
+            <p:spPr>
+              <a:xfrm>
+                <a:off x="578535" y="1605123"/>
+                <a:ext cx="1572470" cy="461665"/>
+              </a:xfrm>
+              <a:prstGeom prst="rect">
+                <a:avLst/>
+              </a:prstGeom>
+              <a:noFill/>
+            </p:spPr>
+            <p:txBody>
+              <a:bodyPr wrap="square" rtlCol="0">
+                <a:spAutoFit/>
+              </a:bodyPr>
+              <a:lstStyle/>
+              <a:p>
+                <a:pPr algn="ctr"/>
+                <a:r>
+                  <a:rPr lang="en-PH" sz="2400" b="1" dirty="0">
+                    <a:latin typeface="Times New Roman" panose="02020603050405020304" pitchFamily="18" charset="0"/>
+                    <a:ea typeface="Malgun Gothic" panose="020B0503020000020004" pitchFamily="34" charset="-127"/>
+                    <a:cs typeface="Times New Roman" panose="02020603050405020304" pitchFamily="18" charset="0"/>
+                  </a:rPr>
+                  <a:t>2 </a:t>
+                </a:r>
+                <a14:m>
+                  <m:oMath xmlns:m="http://schemas.openxmlformats.org/officeDocument/2006/math">
+                    <m:r>
+                      <a:rPr lang="en-US" sz="2400" b="1" i="1" smtClean="0">
+                        <a:latin typeface="Cambria Math" panose="02040503050406030204" pitchFamily="18" charset="0"/>
+                        <a:ea typeface="Malgun Gothic" panose="020B0503020000020004" pitchFamily="34" charset="-127"/>
+                        <a:cs typeface="Times New Roman" panose="02020603050405020304" pitchFamily="18" charset="0"/>
+                      </a:rPr>
+                      <m:t>𝝁</m:t>
+                    </m:r>
+                  </m:oMath>
+                </a14:m>
+                <a:r>
+                  <a:rPr lang="en-PH" sz="2400" b="1" dirty="0">
+                    <a:latin typeface="Times New Roman" panose="02020603050405020304" pitchFamily="18" charset="0"/>
+                    <a:ea typeface="Malgun Gothic" panose="020B0503020000020004" pitchFamily="34" charset="-127"/>
+                    <a:cs typeface="Times New Roman" panose="02020603050405020304" pitchFamily="18" charset="0"/>
+                  </a:rPr>
+                  <a:t>s/div.</a:t>
+                </a:r>
+                <a:endParaRPr lang="en-PH" sz="2400" b="1" baseline="-25000" dirty="0">
+                  <a:latin typeface="Times New Roman" panose="02020603050405020304" pitchFamily="18" charset="0"/>
+                  <a:ea typeface="Malgun Gothic" panose="020B0503020000020004" pitchFamily="34" charset="-127"/>
+                  <a:cs typeface="Times New Roman" panose="02020603050405020304" pitchFamily="18" charset="0"/>
+                </a:endParaRPr>
+              </a:p>
+            </p:txBody>
+          </p:sp>
+        </mc:Choice>
+        <mc:Fallback>
+          <p:sp>
+            <p:nvSpPr>
+              <p:cNvPr id="7" name="TextBox 6">
+                <a:extLst>
+                  <a:ext uri="{FF2B5EF4-FFF2-40B4-BE49-F238E27FC236}">
+                    <a16:creationId xmlns:a16="http://schemas.microsoft.com/office/drawing/2014/main" id="{7FE58045-ADB0-979F-6AF6-857429A0B271}"/>
+                  </a:ext>
+                </a:extLst>
+              </p:cNvPr>
+              <p:cNvSpPr txBox="1">
+                <a:spLocks noRot="1" noChangeAspect="1" noMove="1" noResize="1" noEditPoints="1" noAdjustHandles="1" noChangeArrowheads="1" noChangeShapeType="1" noTextEdit="1"/>
+              </p:cNvSpPr>
+              <p:nvPr/>
+            </p:nvSpPr>
+            <p:spPr>
+              <a:xfrm>
+                <a:off x="578535" y="1605123"/>
+                <a:ext cx="1572470" cy="461665"/>
+              </a:xfrm>
+              <a:prstGeom prst="rect">
+                <a:avLst/>
+              </a:prstGeom>
+              <a:blipFill>
+                <a:blip r:embed="rId3"/>
+                <a:stretch>
+                  <a:fillRect t="-10526" b="-28947"/>
+                </a:stretch>
+              </a:blipFill>
+            </p:spPr>
+            <p:txBody>
+              <a:bodyPr/>
+              <a:lstStyle/>
+              <a:p>
+                <a:r>
+                  <a:rPr lang="en-US">
+                    <a:noFill/>
+                  </a:rPr>
+                  <a:t> </a:t>
+                </a:r>
+              </a:p>
+            </p:txBody>
+          </p:sp>
+        </mc:Fallback>
+      </mc:AlternateContent>
+      <p:cxnSp>
+        <p:nvCxnSpPr>
+          <p:cNvPr id="8" name="Straight Arrow Connector 7">
+            <a:extLst>
+              <a:ext uri="{FF2B5EF4-FFF2-40B4-BE49-F238E27FC236}">
+                <a16:creationId xmlns:a16="http://schemas.microsoft.com/office/drawing/2014/main" id="{1CC8A244-B570-F9FE-829E-C5DBF157B840}"/>
+              </a:ext>
+            </a:extLst>
+          </p:cNvPr>
+          <p:cNvCxnSpPr>
+            <a:cxnSpLocks/>
+          </p:cNvCxnSpPr>
+          <p:nvPr/>
+        </p:nvCxnSpPr>
+        <p:spPr>
+          <a:xfrm>
+            <a:off x="797934" y="3455889"/>
+            <a:ext cx="2939965" cy="0"/>
+          </a:xfrm>
+          <a:prstGeom prst="straightConnector1">
+            <a:avLst/>
+          </a:prstGeom>
+          <a:ln w="38100">
+            <a:solidFill>
+              <a:schemeClr val="tx1"/>
+            </a:solidFill>
+            <a:headEnd type="triangle"/>
+            <a:tailEnd type="triangle"/>
+          </a:ln>
+        </p:spPr>
+        <p:style>
+          <a:lnRef idx="1">
+            <a:schemeClr val="accent1"/>
+          </a:lnRef>
+          <a:fillRef idx="0">
+            <a:schemeClr val="accent1"/>
+          </a:fillRef>
+          <a:effectRef idx="0">
+            <a:schemeClr val="accent1"/>
+          </a:effectRef>
+          <a:fontRef idx="minor">
+            <a:schemeClr val="tx1"/>
+          </a:fontRef>
+        </p:style>
+      </p:cxnSp>
+      <mc:AlternateContent xmlns:mc="http://schemas.openxmlformats.org/markup-compatibility/2006">
+        <mc:Choice xmlns:a14="http://schemas.microsoft.com/office/drawing/2010/main" Requires="a14">
+          <p:sp>
+            <p:nvSpPr>
+              <p:cNvPr id="9" name="TextBox 8">
+                <a:extLst>
+                  <a:ext uri="{FF2B5EF4-FFF2-40B4-BE49-F238E27FC236}">
+                    <a16:creationId xmlns:a16="http://schemas.microsoft.com/office/drawing/2014/main" id="{337A4090-BF1D-6AD8-3393-C43E118D64C1}"/>
+                  </a:ext>
+                </a:extLst>
+              </p:cNvPr>
+              <p:cNvSpPr txBox="1"/>
+              <p:nvPr/>
+            </p:nvSpPr>
+            <p:spPr>
+              <a:xfrm>
+                <a:off x="833880" y="2695877"/>
+                <a:ext cx="2904019" cy="461665"/>
+              </a:xfrm>
+              <a:prstGeom prst="rect">
+                <a:avLst/>
+              </a:prstGeom>
+              <a:noFill/>
+            </p:spPr>
+            <p:txBody>
+              <a:bodyPr wrap="square" rtlCol="0">
+                <a:spAutoFit/>
+              </a:bodyPr>
+              <a:lstStyle/>
+              <a:p>
+                <a:pPr algn="ctr"/>
+                <a:r>
+                  <a:rPr lang="en-US" sz="2400" b="1" dirty="0">
+                    <a:latin typeface="Times New Roman" panose="02020603050405020304" pitchFamily="18" charset="0"/>
+                    <a:ea typeface="Malgun Gothic" panose="020B0503020000020004" pitchFamily="34" charset="-127"/>
+                    <a:cs typeface="Times New Roman" panose="02020603050405020304" pitchFamily="18" charset="0"/>
+                  </a:rPr>
+                  <a:t>½ </a:t>
+                </a:r>
+                <a:r>
+                  <a:rPr lang="en-US" sz="2400" b="1" i="1" dirty="0">
+                    <a:latin typeface="Times New Roman" panose="02020603050405020304" pitchFamily="18" charset="0"/>
+                    <a:ea typeface="Malgun Gothic" panose="020B0503020000020004" pitchFamily="34" charset="-127"/>
+                    <a:cs typeface="Times New Roman" panose="02020603050405020304" pitchFamily="18" charset="0"/>
+                  </a:rPr>
+                  <a:t>T</a:t>
+                </a:r>
+                <a:r>
+                  <a:rPr lang="en-US" sz="2400" b="1" baseline="-25000" dirty="0">
+                    <a:latin typeface="Times New Roman" panose="02020603050405020304" pitchFamily="18" charset="0"/>
+                    <a:ea typeface="Malgun Gothic" panose="020B0503020000020004" pitchFamily="34" charset="-127"/>
+                    <a:cs typeface="Times New Roman" panose="02020603050405020304" pitchFamily="18" charset="0"/>
+                  </a:rPr>
+                  <a:t>s</a:t>
+                </a:r>
+                <a:r>
+                  <a:rPr lang="en-US" sz="2400" b="1" dirty="0">
+                    <a:latin typeface="Times New Roman" panose="02020603050405020304" pitchFamily="18" charset="0"/>
+                    <a:ea typeface="Malgun Gothic" panose="020B0503020000020004" pitchFamily="34" charset="-127"/>
+                    <a:cs typeface="Times New Roman" panose="02020603050405020304" pitchFamily="18" charset="0"/>
+                  </a:rPr>
+                  <a:t> (5</a:t>
+                </a:r>
+                <a14:m>
+                  <m:oMath xmlns:m="http://schemas.openxmlformats.org/officeDocument/2006/math">
+                    <m:r>
+                      <a:rPr lang="en-US" sz="2400" b="1" i="1" smtClean="0">
+                        <a:latin typeface="Cambria Math" panose="02040503050406030204" pitchFamily="18" charset="0"/>
+                        <a:ea typeface="Malgun Gothic" panose="020B0503020000020004" pitchFamily="34" charset="-127"/>
+                        <a:cs typeface="Times New Roman" panose="02020603050405020304" pitchFamily="18" charset="0"/>
+                      </a:rPr>
+                      <m:t>𝝁</m:t>
+                    </m:r>
+                  </m:oMath>
+                </a14:m>
+                <a:r>
+                  <a:rPr lang="en-PH" sz="2400" b="1" dirty="0">
+                    <a:latin typeface="Times New Roman" panose="02020603050405020304" pitchFamily="18" charset="0"/>
+                    <a:ea typeface="Malgun Gothic" panose="020B0503020000020004" pitchFamily="34" charset="-127"/>
+                    <a:cs typeface="Times New Roman" panose="02020603050405020304" pitchFamily="18" charset="0"/>
+                  </a:rPr>
+                  <a:t>s)</a:t>
+                </a:r>
+              </a:p>
+            </p:txBody>
+          </p:sp>
+        </mc:Choice>
+        <mc:Fallback>
+          <p:sp>
+            <p:nvSpPr>
+              <p:cNvPr id="9" name="TextBox 8">
+                <a:extLst>
+                  <a:ext uri="{FF2B5EF4-FFF2-40B4-BE49-F238E27FC236}">
+                    <a16:creationId xmlns:a16="http://schemas.microsoft.com/office/drawing/2014/main" id="{337A4090-BF1D-6AD8-3393-C43E118D64C1}"/>
+                  </a:ext>
+                </a:extLst>
+              </p:cNvPr>
+              <p:cNvSpPr txBox="1">
+                <a:spLocks noRot="1" noChangeAspect="1" noMove="1" noResize="1" noEditPoints="1" noAdjustHandles="1" noChangeArrowheads="1" noChangeShapeType="1" noTextEdit="1"/>
+              </p:cNvSpPr>
+              <p:nvPr/>
+            </p:nvSpPr>
+            <p:spPr>
+              <a:xfrm>
+                <a:off x="833880" y="2695877"/>
+                <a:ext cx="2904019" cy="461665"/>
+              </a:xfrm>
+              <a:prstGeom prst="rect">
+                <a:avLst/>
+              </a:prstGeom>
+              <a:blipFill>
+                <a:blip r:embed="rId4"/>
+                <a:stretch>
+                  <a:fillRect t="-10526" b="-28947"/>
+                </a:stretch>
+              </a:blipFill>
+            </p:spPr>
+            <p:txBody>
+              <a:bodyPr/>
+              <a:lstStyle/>
+              <a:p>
+                <a:r>
+                  <a:rPr lang="en-US">
+                    <a:noFill/>
+                  </a:rPr>
+                  <a:t> </a:t>
+                </a:r>
+              </a:p>
+            </p:txBody>
+          </p:sp>
+        </mc:Fallback>
+      </mc:AlternateContent>
+      <p:cxnSp>
+        <p:nvCxnSpPr>
+          <p:cNvPr id="10" name="Straight Connector 9">
+            <a:extLst>
+              <a:ext uri="{FF2B5EF4-FFF2-40B4-BE49-F238E27FC236}">
+                <a16:creationId xmlns:a16="http://schemas.microsoft.com/office/drawing/2014/main" id="{C2697608-1827-EE06-518B-1E49DFA18330}"/>
+              </a:ext>
+            </a:extLst>
+          </p:cNvPr>
+          <p:cNvCxnSpPr>
+            <a:cxnSpLocks/>
+          </p:cNvCxnSpPr>
+          <p:nvPr/>
+        </p:nvCxnSpPr>
+        <p:spPr>
+          <a:xfrm>
+            <a:off x="738504" y="6522369"/>
+            <a:ext cx="0" cy="1358139"/>
+          </a:xfrm>
+          <a:prstGeom prst="line">
+            <a:avLst/>
+          </a:prstGeom>
+          <a:ln w="19050">
+            <a:solidFill>
+              <a:srgbClr val="FF0000"/>
+            </a:solidFill>
+            <a:prstDash val="dash"/>
+          </a:ln>
+        </p:spPr>
+        <p:style>
+          <a:lnRef idx="1">
+            <a:schemeClr val="accent1"/>
+          </a:lnRef>
+          <a:fillRef idx="0">
+            <a:schemeClr val="accent1"/>
+          </a:fillRef>
+          <a:effectRef idx="0">
+            <a:schemeClr val="accent1"/>
+          </a:effectRef>
+          <a:fontRef idx="minor">
+            <a:schemeClr val="tx1"/>
+          </a:fontRef>
+        </p:style>
+      </p:cxnSp>
+      <p:cxnSp>
+        <p:nvCxnSpPr>
+          <p:cNvPr id="17" name="Straight Connector 16">
+            <a:extLst>
+              <a:ext uri="{FF2B5EF4-FFF2-40B4-BE49-F238E27FC236}">
+                <a16:creationId xmlns:a16="http://schemas.microsoft.com/office/drawing/2014/main" id="{11FE4F5F-C284-A46C-D75F-ED8C27BBA34C}"/>
+              </a:ext>
+            </a:extLst>
+          </p:cNvPr>
+          <p:cNvCxnSpPr>
+            <a:cxnSpLocks/>
+          </p:cNvCxnSpPr>
+          <p:nvPr/>
+        </p:nvCxnSpPr>
+        <p:spPr>
+          <a:xfrm>
+            <a:off x="755335" y="3455889"/>
+            <a:ext cx="0" cy="2644534"/>
+          </a:xfrm>
+          <a:prstGeom prst="line">
+            <a:avLst/>
+          </a:prstGeom>
+          <a:ln w="19050">
+            <a:solidFill>
+              <a:srgbClr val="FF0000"/>
+            </a:solidFill>
+            <a:prstDash val="dash"/>
+          </a:ln>
+        </p:spPr>
+        <p:style>
+          <a:lnRef idx="1">
+            <a:schemeClr val="accent1"/>
+          </a:lnRef>
+          <a:fillRef idx="0">
+            <a:schemeClr val="accent1"/>
+          </a:fillRef>
+          <a:effectRef idx="0">
+            <a:schemeClr val="accent1"/>
+          </a:effectRef>
+          <a:fontRef idx="minor">
+            <a:schemeClr val="tx1"/>
+          </a:fontRef>
+        </p:style>
+      </p:cxnSp>
+      <p:cxnSp>
+        <p:nvCxnSpPr>
+          <p:cNvPr id="23" name="Straight Connector 22">
+            <a:extLst>
+              <a:ext uri="{FF2B5EF4-FFF2-40B4-BE49-F238E27FC236}">
+                <a16:creationId xmlns:a16="http://schemas.microsoft.com/office/drawing/2014/main" id="{FECCA9DE-4BD5-39CC-C352-A65990B7F786}"/>
+              </a:ext>
+            </a:extLst>
+          </p:cNvPr>
+          <p:cNvCxnSpPr>
+            <a:cxnSpLocks/>
+          </p:cNvCxnSpPr>
+          <p:nvPr/>
+        </p:nvCxnSpPr>
+        <p:spPr>
+          <a:xfrm>
+            <a:off x="3827405" y="3342208"/>
+            <a:ext cx="0" cy="2766584"/>
+          </a:xfrm>
+          <a:prstGeom prst="line">
+            <a:avLst/>
+          </a:prstGeom>
+          <a:ln w="19050">
+            <a:solidFill>
+              <a:srgbClr val="FF0000"/>
+            </a:solidFill>
+            <a:prstDash val="dash"/>
+          </a:ln>
+        </p:spPr>
+        <p:style>
+          <a:lnRef idx="1">
+            <a:schemeClr val="accent1"/>
+          </a:lnRef>
+          <a:fillRef idx="0">
+            <a:schemeClr val="accent1"/>
+          </a:fillRef>
+          <a:effectRef idx="0">
+            <a:schemeClr val="accent1"/>
+          </a:effectRef>
+          <a:fontRef idx="minor">
+            <a:schemeClr val="tx1"/>
+          </a:fontRef>
+        </p:style>
+      </p:cxnSp>
+      <p:cxnSp>
+        <p:nvCxnSpPr>
+          <p:cNvPr id="24" name="Straight Connector 23">
+            <a:extLst>
+              <a:ext uri="{FF2B5EF4-FFF2-40B4-BE49-F238E27FC236}">
+                <a16:creationId xmlns:a16="http://schemas.microsoft.com/office/drawing/2014/main" id="{A38A0E6B-629C-2D6C-0E18-17B1F0FCEB13}"/>
+              </a:ext>
+            </a:extLst>
+          </p:cNvPr>
+          <p:cNvCxnSpPr>
+            <a:cxnSpLocks/>
+          </p:cNvCxnSpPr>
+          <p:nvPr/>
+        </p:nvCxnSpPr>
+        <p:spPr>
+          <a:xfrm>
+            <a:off x="8011913" y="3813507"/>
+            <a:ext cx="0" cy="2304703"/>
+          </a:xfrm>
+          <a:prstGeom prst="line">
+            <a:avLst/>
+          </a:prstGeom>
+          <a:ln w="19050">
+            <a:solidFill>
+              <a:srgbClr val="FF0000"/>
+            </a:solidFill>
+            <a:prstDash val="dash"/>
+          </a:ln>
+        </p:spPr>
+        <p:style>
+          <a:lnRef idx="1">
+            <a:schemeClr val="accent1"/>
+          </a:lnRef>
+          <a:fillRef idx="0">
+            <a:schemeClr val="accent1"/>
+          </a:fillRef>
+          <a:effectRef idx="0">
+            <a:schemeClr val="accent1"/>
+          </a:effectRef>
+          <a:fontRef idx="minor">
+            <a:schemeClr val="tx1"/>
+          </a:fontRef>
+        </p:style>
+      </p:cxnSp>
+      <p:cxnSp>
+        <p:nvCxnSpPr>
+          <p:cNvPr id="30" name="Straight Connector 29">
+            <a:extLst>
+              <a:ext uri="{FF2B5EF4-FFF2-40B4-BE49-F238E27FC236}">
+                <a16:creationId xmlns:a16="http://schemas.microsoft.com/office/drawing/2014/main" id="{EFB494C3-A54B-09B9-FE67-0DBDF6D8A9A3}"/>
+              </a:ext>
+            </a:extLst>
+          </p:cNvPr>
+          <p:cNvCxnSpPr>
+            <a:cxnSpLocks/>
+          </p:cNvCxnSpPr>
+          <p:nvPr/>
+        </p:nvCxnSpPr>
+        <p:spPr>
+          <a:xfrm>
+            <a:off x="4997954" y="3813507"/>
+            <a:ext cx="0" cy="2277291"/>
+          </a:xfrm>
+          <a:prstGeom prst="line">
+            <a:avLst/>
+          </a:prstGeom>
+          <a:ln w="19050">
+            <a:solidFill>
+              <a:srgbClr val="FF0000"/>
+            </a:solidFill>
+            <a:prstDash val="dash"/>
+          </a:ln>
+        </p:spPr>
+        <p:style>
+          <a:lnRef idx="1">
+            <a:schemeClr val="accent1"/>
+          </a:lnRef>
+          <a:fillRef idx="0">
+            <a:schemeClr val="accent1"/>
+          </a:fillRef>
+          <a:effectRef idx="0">
+            <a:schemeClr val="accent1"/>
+          </a:effectRef>
+          <a:fontRef idx="minor">
+            <a:schemeClr val="tx1"/>
+          </a:fontRef>
+        </p:style>
+      </p:cxnSp>
+      <p:sp>
+        <p:nvSpPr>
+          <p:cNvPr id="31" name="TextBox 30">
+            <a:extLst>
+              <a:ext uri="{FF2B5EF4-FFF2-40B4-BE49-F238E27FC236}">
+                <a16:creationId xmlns:a16="http://schemas.microsoft.com/office/drawing/2014/main" id="{C63DD308-F7C7-4E54-702A-233DB243FD9B}"/>
+              </a:ext>
+            </a:extLst>
+          </p:cNvPr>
+          <p:cNvSpPr txBox="1"/>
+          <p:nvPr/>
+        </p:nvSpPr>
+        <p:spPr>
+          <a:xfrm>
+            <a:off x="4504782" y="3189453"/>
+            <a:ext cx="2904019" cy="461665"/>
+          </a:xfrm>
+          <a:prstGeom prst="rect">
+            <a:avLst/>
+          </a:prstGeom>
+          <a:noFill/>
+        </p:spPr>
+        <p:txBody>
+          <a:bodyPr wrap="square" rtlCol="0">
+            <a:spAutoFit/>
+          </a:bodyPr>
+          <a:lstStyle/>
+          <a:p>
+            <a:pPr algn="ctr"/>
+            <a:r>
+              <a:rPr lang="en-US" sz="2400" b="1" i="1" dirty="0">
+                <a:latin typeface="Times New Roman" panose="02020603050405020304" pitchFamily="18" charset="0"/>
+                <a:ea typeface="Malgun Gothic" panose="020B0503020000020004" pitchFamily="34" charset="-127"/>
+                <a:cs typeface="Times New Roman" panose="02020603050405020304" pitchFamily="18" charset="0"/>
+              </a:rPr>
+              <a:t>S</a:t>
+            </a:r>
+            <a:r>
+              <a:rPr lang="en-US" sz="2400" b="1" baseline="-25000" dirty="0">
+                <a:latin typeface="Times New Roman" panose="02020603050405020304" pitchFamily="18" charset="0"/>
+                <a:ea typeface="Malgun Gothic" panose="020B0503020000020004" pitchFamily="34" charset="-127"/>
+                <a:cs typeface="Times New Roman" panose="02020603050405020304" pitchFamily="18" charset="0"/>
+              </a:rPr>
+              <a:t>1 </a:t>
+            </a:r>
+            <a:r>
+              <a:rPr lang="en-US" sz="2400" dirty="0">
+                <a:latin typeface="Times New Roman" panose="02020603050405020304" pitchFamily="18" charset="0"/>
+                <a:ea typeface="Malgun Gothic" panose="020B0503020000020004" pitchFamily="34" charset="-127"/>
+                <a:cs typeface="Times New Roman" panose="02020603050405020304" pitchFamily="18" charset="0"/>
+              </a:rPr>
+              <a:t>OFF</a:t>
+            </a:r>
+            <a:endParaRPr lang="en-PH" sz="2400" b="1" dirty="0">
+              <a:latin typeface="Times New Roman" panose="02020603050405020304" pitchFamily="18" charset="0"/>
+              <a:ea typeface="Malgun Gothic" panose="020B0503020000020004" pitchFamily="34" charset="-127"/>
+              <a:cs typeface="Times New Roman" panose="02020603050405020304" pitchFamily="18" charset="0"/>
+            </a:endParaRPr>
+          </a:p>
+        </p:txBody>
+      </p:sp>
+      <p:cxnSp>
+        <p:nvCxnSpPr>
+          <p:cNvPr id="32" name="Straight Arrow Connector 31">
+            <a:extLst>
+              <a:ext uri="{FF2B5EF4-FFF2-40B4-BE49-F238E27FC236}">
+                <a16:creationId xmlns:a16="http://schemas.microsoft.com/office/drawing/2014/main" id="{6670678A-BB9A-65DD-4796-19DBD4D6C45C}"/>
+              </a:ext>
+            </a:extLst>
+          </p:cNvPr>
+          <p:cNvCxnSpPr/>
+          <p:nvPr/>
+        </p:nvCxnSpPr>
+        <p:spPr>
+          <a:xfrm flipH="1">
+            <a:off x="3869265" y="3437387"/>
+            <a:ext cx="1329266" cy="0"/>
+          </a:xfrm>
+          <a:prstGeom prst="straightConnector1">
+            <a:avLst/>
+          </a:prstGeom>
+          <a:ln w="38100">
+            <a:solidFill>
+              <a:schemeClr val="tx1"/>
+            </a:solidFill>
+            <a:tailEnd type="triangle"/>
+          </a:ln>
+        </p:spPr>
+        <p:style>
+          <a:lnRef idx="1">
+            <a:schemeClr val="accent1"/>
+          </a:lnRef>
+          <a:fillRef idx="0">
+            <a:schemeClr val="accent1"/>
+          </a:fillRef>
+          <a:effectRef idx="0">
+            <a:schemeClr val="accent1"/>
+          </a:effectRef>
+          <a:fontRef idx="minor">
+            <a:schemeClr val="tx1"/>
+          </a:fontRef>
+        </p:style>
+      </p:cxnSp>
+      <p:sp>
+        <p:nvSpPr>
+          <p:cNvPr id="33" name="TextBox 32">
+            <a:extLst>
+              <a:ext uri="{FF2B5EF4-FFF2-40B4-BE49-F238E27FC236}">
+                <a16:creationId xmlns:a16="http://schemas.microsoft.com/office/drawing/2014/main" id="{86B18078-2457-1A1F-CA81-1F1E73DA220E}"/>
+              </a:ext>
+            </a:extLst>
+          </p:cNvPr>
+          <p:cNvSpPr txBox="1"/>
+          <p:nvPr/>
+        </p:nvSpPr>
+        <p:spPr>
+          <a:xfrm>
+            <a:off x="1457256" y="3807281"/>
+            <a:ext cx="2904019" cy="461665"/>
+          </a:xfrm>
+          <a:prstGeom prst="rect">
+            <a:avLst/>
+          </a:prstGeom>
+          <a:noFill/>
+        </p:spPr>
+        <p:txBody>
+          <a:bodyPr wrap="square" rtlCol="0">
+            <a:spAutoFit/>
+          </a:bodyPr>
+          <a:lstStyle/>
+          <a:p>
+            <a:pPr algn="ctr"/>
+            <a:r>
+              <a:rPr lang="en-US" sz="2400" b="1" i="1" dirty="0">
+                <a:latin typeface="Times New Roman" panose="02020603050405020304" pitchFamily="18" charset="0"/>
+                <a:ea typeface="Malgun Gothic" panose="020B0503020000020004" pitchFamily="34" charset="-127"/>
+                <a:cs typeface="Times New Roman" panose="02020603050405020304" pitchFamily="18" charset="0"/>
+              </a:rPr>
+              <a:t>S</a:t>
+            </a:r>
+            <a:r>
+              <a:rPr lang="en-US" sz="2400" b="1" baseline="-25000" dirty="0">
+                <a:latin typeface="Times New Roman" panose="02020603050405020304" pitchFamily="18" charset="0"/>
+                <a:ea typeface="Malgun Gothic" panose="020B0503020000020004" pitchFamily="34" charset="-127"/>
+                <a:cs typeface="Times New Roman" panose="02020603050405020304" pitchFamily="18" charset="0"/>
+              </a:rPr>
+              <a:t>2 </a:t>
+            </a:r>
+            <a:r>
+              <a:rPr lang="en-US" sz="2400" dirty="0">
+                <a:latin typeface="Times New Roman" panose="02020603050405020304" pitchFamily="18" charset="0"/>
+                <a:ea typeface="Malgun Gothic" panose="020B0503020000020004" pitchFamily="34" charset="-127"/>
+                <a:cs typeface="Times New Roman" panose="02020603050405020304" pitchFamily="18" charset="0"/>
+              </a:rPr>
+              <a:t>OFF</a:t>
+            </a:r>
+            <a:endParaRPr lang="en-PH" sz="2400" b="1" dirty="0">
+              <a:latin typeface="Times New Roman" panose="02020603050405020304" pitchFamily="18" charset="0"/>
+              <a:ea typeface="Malgun Gothic" panose="020B0503020000020004" pitchFamily="34" charset="-127"/>
+              <a:cs typeface="Times New Roman" panose="02020603050405020304" pitchFamily="18" charset="0"/>
+            </a:endParaRPr>
+          </a:p>
+        </p:txBody>
+      </p:sp>
+      <p:cxnSp>
+        <p:nvCxnSpPr>
+          <p:cNvPr id="34" name="Straight Arrow Connector 33">
+            <a:extLst>
+              <a:ext uri="{FF2B5EF4-FFF2-40B4-BE49-F238E27FC236}">
+                <a16:creationId xmlns:a16="http://schemas.microsoft.com/office/drawing/2014/main" id="{DA43583B-D220-F5DB-9241-D31B5B505E8C}"/>
+              </a:ext>
+            </a:extLst>
+          </p:cNvPr>
+          <p:cNvCxnSpPr>
+            <a:cxnSpLocks/>
+          </p:cNvCxnSpPr>
+          <p:nvPr/>
+        </p:nvCxnSpPr>
+        <p:spPr>
+          <a:xfrm>
+            <a:off x="6663273" y="3437387"/>
+            <a:ext cx="1329266" cy="0"/>
+          </a:xfrm>
+          <a:prstGeom prst="straightConnector1">
+            <a:avLst/>
+          </a:prstGeom>
+          <a:ln w="38100">
+            <a:solidFill>
+              <a:schemeClr val="tx1"/>
+            </a:solidFill>
+            <a:tailEnd type="triangle"/>
+          </a:ln>
+        </p:spPr>
+        <p:style>
+          <a:lnRef idx="1">
+            <a:schemeClr val="accent1"/>
+          </a:lnRef>
+          <a:fillRef idx="0">
+            <a:schemeClr val="accent1"/>
+          </a:fillRef>
+          <a:effectRef idx="0">
+            <a:schemeClr val="accent1"/>
+          </a:effectRef>
+          <a:fontRef idx="minor">
+            <a:schemeClr val="tx1"/>
+          </a:fontRef>
+        </p:style>
+      </p:cxnSp>
+      <p:cxnSp>
+        <p:nvCxnSpPr>
+          <p:cNvPr id="35" name="Straight Arrow Connector 34">
+            <a:extLst>
+              <a:ext uri="{FF2B5EF4-FFF2-40B4-BE49-F238E27FC236}">
+                <a16:creationId xmlns:a16="http://schemas.microsoft.com/office/drawing/2014/main" id="{7B1D2B4D-3772-6580-53B3-94E93E31CEFA}"/>
+              </a:ext>
+            </a:extLst>
+          </p:cNvPr>
+          <p:cNvCxnSpPr/>
+          <p:nvPr/>
+        </p:nvCxnSpPr>
+        <p:spPr>
+          <a:xfrm flipH="1">
+            <a:off x="821739" y="4061002"/>
+            <a:ext cx="1329266" cy="0"/>
+          </a:xfrm>
+          <a:prstGeom prst="straightConnector1">
+            <a:avLst/>
+          </a:prstGeom>
+          <a:ln w="38100">
+            <a:solidFill>
+              <a:schemeClr val="tx1"/>
+            </a:solidFill>
+            <a:tailEnd type="triangle"/>
+          </a:ln>
+        </p:spPr>
+        <p:style>
+          <a:lnRef idx="1">
+            <a:schemeClr val="accent1"/>
+          </a:lnRef>
+          <a:fillRef idx="0">
+            <a:schemeClr val="accent1"/>
+          </a:fillRef>
+          <a:effectRef idx="0">
+            <a:schemeClr val="accent1"/>
+          </a:effectRef>
+          <a:fontRef idx="minor">
+            <a:schemeClr val="tx1"/>
+          </a:fontRef>
+        </p:style>
+      </p:cxnSp>
+      <p:cxnSp>
+        <p:nvCxnSpPr>
+          <p:cNvPr id="36" name="Straight Arrow Connector 35">
+            <a:extLst>
+              <a:ext uri="{FF2B5EF4-FFF2-40B4-BE49-F238E27FC236}">
+                <a16:creationId xmlns:a16="http://schemas.microsoft.com/office/drawing/2014/main" id="{930C28B5-AA55-F051-9FDB-CE176DE274E1}"/>
+              </a:ext>
+            </a:extLst>
+          </p:cNvPr>
+          <p:cNvCxnSpPr>
+            <a:cxnSpLocks/>
+          </p:cNvCxnSpPr>
+          <p:nvPr/>
+        </p:nvCxnSpPr>
+        <p:spPr>
+          <a:xfrm>
+            <a:off x="3615747" y="4061002"/>
+            <a:ext cx="1329266" cy="0"/>
+          </a:xfrm>
+          <a:prstGeom prst="straightConnector1">
+            <a:avLst/>
+          </a:prstGeom>
+          <a:ln w="38100">
+            <a:solidFill>
+              <a:schemeClr val="tx1"/>
+            </a:solidFill>
+            <a:tailEnd type="triangle"/>
+          </a:ln>
+        </p:spPr>
+        <p:style>
+          <a:lnRef idx="1">
+            <a:schemeClr val="accent1"/>
+          </a:lnRef>
+          <a:fillRef idx="0">
+            <a:schemeClr val="accent1"/>
+          </a:fillRef>
+          <a:effectRef idx="0">
+            <a:schemeClr val="accent1"/>
+          </a:effectRef>
+          <a:fontRef idx="minor">
+            <a:schemeClr val="tx1"/>
+          </a:fontRef>
+        </p:style>
+      </p:cxnSp>
+      <p:sp>
+        <p:nvSpPr>
+          <p:cNvPr id="52" name="TextBox 6">
+            <a:extLst>
+              <a:ext uri="{FF2B5EF4-FFF2-40B4-BE49-F238E27FC236}">
+                <a16:creationId xmlns:a16="http://schemas.microsoft.com/office/drawing/2014/main" id="{F4358F1F-24AC-99AE-2769-33596AD3F3FB}"/>
+              </a:ext>
+            </a:extLst>
+          </p:cNvPr>
+          <p:cNvSpPr txBox="1"/>
+          <p:nvPr/>
+        </p:nvSpPr>
+        <p:spPr>
+          <a:xfrm>
+            <a:off x="9109278" y="1368517"/>
+            <a:ext cx="2641401" cy="646331"/>
+          </a:xfrm>
+          <a:prstGeom prst="rect">
+            <a:avLst/>
+          </a:prstGeom>
+          <a:noFill/>
+        </p:spPr>
+        <p:txBody>
+          <a:bodyPr wrap="square" rtlCol="0">
+            <a:spAutoFit/>
+          </a:bodyPr>
+          <a:lstStyle/>
+          <a:p>
+            <a:pPr algn="r"/>
+            <a:r>
+              <a:rPr lang="en-PH" sz="3600" b="1" i="1" dirty="0">
+                <a:latin typeface="Times New Roman" panose="02020603050405020304" pitchFamily="18" charset="0"/>
+                <a:ea typeface="Malgun Gothic" panose="020B0503020000020004" pitchFamily="34" charset="-127"/>
+                <a:cs typeface="Times New Roman" panose="02020603050405020304" pitchFamily="18" charset="0"/>
+              </a:rPr>
+              <a:t>v</a:t>
+            </a:r>
+            <a:r>
+              <a:rPr lang="en-PH" sz="3600" b="1" i="1" baseline="-25000" dirty="0">
+                <a:latin typeface="Times New Roman" panose="02020603050405020304" pitchFamily="18" charset="0"/>
+                <a:ea typeface="Malgun Gothic" panose="020B0503020000020004" pitchFamily="34" charset="-127"/>
+                <a:cs typeface="Times New Roman" panose="02020603050405020304" pitchFamily="18" charset="0"/>
+              </a:rPr>
+              <a:t>in</a:t>
+            </a:r>
+          </a:p>
+        </p:txBody>
+      </p:sp>
+      <p:sp>
+        <p:nvSpPr>
+          <p:cNvPr id="53" name="TextBox 7">
+            <a:extLst>
+              <a:ext uri="{FF2B5EF4-FFF2-40B4-BE49-F238E27FC236}">
+                <a16:creationId xmlns:a16="http://schemas.microsoft.com/office/drawing/2014/main" id="{98F5A13B-5043-D8FE-943B-0CA0C891AA5C}"/>
+              </a:ext>
+            </a:extLst>
+          </p:cNvPr>
+          <p:cNvSpPr txBox="1"/>
+          <p:nvPr/>
+        </p:nvSpPr>
+        <p:spPr>
+          <a:xfrm>
+            <a:off x="9109278" y="2763411"/>
+            <a:ext cx="2641401" cy="646331"/>
+          </a:xfrm>
+          <a:prstGeom prst="rect">
+            <a:avLst/>
+          </a:prstGeom>
+          <a:noFill/>
+        </p:spPr>
+        <p:txBody>
+          <a:bodyPr wrap="square" rtlCol="0">
+            <a:spAutoFit/>
+          </a:bodyPr>
+          <a:lstStyle/>
+          <a:p>
+            <a:pPr algn="r"/>
+            <a:r>
+              <a:rPr lang="en-PH" sz="3600" b="1" i="1" dirty="0">
+                <a:solidFill>
+                  <a:srgbClr val="21C2C8"/>
+                </a:solidFill>
+                <a:latin typeface="Times New Roman" panose="02020603050405020304" pitchFamily="18" charset="0"/>
+                <a:ea typeface="Malgun Gothic" panose="020B0503020000020004" pitchFamily="34" charset="-127"/>
+                <a:cs typeface="Times New Roman" panose="02020603050405020304" pitchFamily="18" charset="0"/>
+              </a:rPr>
+              <a:t>V</a:t>
+            </a:r>
+            <a:r>
+              <a:rPr lang="en-PH" sz="3600" b="1" i="1" baseline="-25000" dirty="0">
+                <a:solidFill>
+                  <a:srgbClr val="21C2C8"/>
+                </a:solidFill>
+                <a:latin typeface="Times New Roman" panose="02020603050405020304" pitchFamily="18" charset="0"/>
+                <a:ea typeface="Malgun Gothic" panose="020B0503020000020004" pitchFamily="34" charset="-127"/>
+                <a:cs typeface="Times New Roman" panose="02020603050405020304" pitchFamily="18" charset="0"/>
+              </a:rPr>
+              <a:t>o</a:t>
+            </a:r>
+          </a:p>
+        </p:txBody>
+      </p:sp>
+      <p:sp>
+        <p:nvSpPr>
+          <p:cNvPr id="54" name="TextBox 8">
+            <a:extLst>
+              <a:ext uri="{FF2B5EF4-FFF2-40B4-BE49-F238E27FC236}">
+                <a16:creationId xmlns:a16="http://schemas.microsoft.com/office/drawing/2014/main" id="{9BBB6F60-EE27-743B-EC53-198FB17FC497}"/>
+              </a:ext>
+            </a:extLst>
+          </p:cNvPr>
+          <p:cNvSpPr txBox="1"/>
+          <p:nvPr/>
+        </p:nvSpPr>
+        <p:spPr>
+          <a:xfrm>
+            <a:off x="9247498" y="3724123"/>
+            <a:ext cx="2641401" cy="646331"/>
+          </a:xfrm>
+          <a:prstGeom prst="rect">
+            <a:avLst/>
+          </a:prstGeom>
+          <a:noFill/>
+        </p:spPr>
+        <p:txBody>
+          <a:bodyPr wrap="square" rtlCol="0">
+            <a:spAutoFit/>
+          </a:bodyPr>
+          <a:lstStyle/>
+          <a:p>
+            <a:pPr algn="r"/>
+            <a:r>
+              <a:rPr lang="en-PH" sz="3600" b="1" i="1" dirty="0">
+                <a:solidFill>
+                  <a:srgbClr val="E83154"/>
+                </a:solidFill>
+                <a:latin typeface="Times New Roman" panose="02020603050405020304" pitchFamily="18" charset="0"/>
+                <a:ea typeface="Malgun Gothic" panose="020B0503020000020004" pitchFamily="34" charset="-127"/>
+                <a:cs typeface="Times New Roman" panose="02020603050405020304" pitchFamily="18" charset="0"/>
+              </a:rPr>
+              <a:t>v</a:t>
+            </a:r>
+            <a:r>
+              <a:rPr lang="en-PH" sz="3600" b="1" i="1" baseline="-25000" dirty="0">
+                <a:solidFill>
+                  <a:srgbClr val="E83154"/>
+                </a:solidFill>
+                <a:latin typeface="Times New Roman" panose="02020603050405020304" pitchFamily="18" charset="0"/>
+                <a:ea typeface="Malgun Gothic" panose="020B0503020000020004" pitchFamily="34" charset="-127"/>
+                <a:cs typeface="Times New Roman" panose="02020603050405020304" pitchFamily="18" charset="0"/>
+              </a:rPr>
+              <a:t>ds</a:t>
+            </a:r>
+            <a:r>
+              <a:rPr lang="en-PH" sz="3600" b="1" baseline="-25000" dirty="0">
+                <a:solidFill>
+                  <a:srgbClr val="E83154"/>
+                </a:solidFill>
+                <a:latin typeface="Times New Roman" panose="02020603050405020304" pitchFamily="18" charset="0"/>
+                <a:ea typeface="Malgun Gothic" panose="020B0503020000020004" pitchFamily="34" charset="-127"/>
+                <a:cs typeface="Times New Roman" panose="02020603050405020304" pitchFamily="18" charset="0"/>
+              </a:rPr>
+              <a:t>1,</a:t>
+            </a:r>
+            <a:r>
+              <a:rPr lang="en-PH" sz="3600" b="1" dirty="0">
+                <a:solidFill>
+                  <a:srgbClr val="E83154"/>
+                </a:solidFill>
+                <a:latin typeface="Times New Roman" panose="02020603050405020304" pitchFamily="18" charset="0"/>
+                <a:ea typeface="Malgun Gothic" panose="020B0503020000020004" pitchFamily="34" charset="-127"/>
+                <a:cs typeface="Times New Roman" panose="02020603050405020304" pitchFamily="18" charset="0"/>
+              </a:rPr>
+              <a:t> </a:t>
+            </a:r>
+            <a:r>
+              <a:rPr lang="en-PH" sz="3600" b="1" i="1" dirty="0">
+                <a:solidFill>
+                  <a:srgbClr val="93CF33"/>
+                </a:solidFill>
+                <a:latin typeface="Times New Roman" panose="02020603050405020304" pitchFamily="18" charset="0"/>
+                <a:ea typeface="Malgun Gothic" panose="020B0503020000020004" pitchFamily="34" charset="-127"/>
+                <a:cs typeface="Times New Roman" panose="02020603050405020304" pitchFamily="18" charset="0"/>
+              </a:rPr>
+              <a:t>v</a:t>
+            </a:r>
+            <a:r>
+              <a:rPr lang="en-PH" sz="3600" b="1" i="1" baseline="-25000" dirty="0">
+                <a:solidFill>
+                  <a:srgbClr val="93CF33"/>
+                </a:solidFill>
+                <a:latin typeface="Times New Roman" panose="02020603050405020304" pitchFamily="18" charset="0"/>
+                <a:ea typeface="Malgun Gothic" panose="020B0503020000020004" pitchFamily="34" charset="-127"/>
+                <a:cs typeface="Times New Roman" panose="02020603050405020304" pitchFamily="18" charset="0"/>
+              </a:rPr>
+              <a:t>ds</a:t>
+            </a:r>
+            <a:r>
+              <a:rPr lang="en-PH" sz="3600" b="1" baseline="-25000" dirty="0">
+                <a:solidFill>
+                  <a:srgbClr val="93CF33"/>
+                </a:solidFill>
+                <a:latin typeface="Times New Roman" panose="02020603050405020304" pitchFamily="18" charset="0"/>
+                <a:ea typeface="Malgun Gothic" panose="020B0503020000020004" pitchFamily="34" charset="-127"/>
+                <a:cs typeface="Times New Roman" panose="02020603050405020304" pitchFamily="18" charset="0"/>
+              </a:rPr>
+              <a:t>2</a:t>
+            </a:r>
+          </a:p>
+        </p:txBody>
+      </p:sp>
+      <p:sp>
+        <p:nvSpPr>
+          <p:cNvPr id="55" name="TextBox 9">
+            <a:extLst>
+              <a:ext uri="{FF2B5EF4-FFF2-40B4-BE49-F238E27FC236}">
+                <a16:creationId xmlns:a16="http://schemas.microsoft.com/office/drawing/2014/main" id="{5F1478F3-BF85-6878-3913-95DBE68D3ACC}"/>
+              </a:ext>
+            </a:extLst>
+          </p:cNvPr>
+          <p:cNvSpPr txBox="1"/>
+          <p:nvPr/>
+        </p:nvSpPr>
+        <p:spPr>
+          <a:xfrm>
+            <a:off x="9369479" y="5066929"/>
+            <a:ext cx="2542843" cy="646331"/>
+          </a:xfrm>
+          <a:prstGeom prst="rect">
+            <a:avLst/>
+          </a:prstGeom>
+          <a:noFill/>
+        </p:spPr>
+        <p:txBody>
+          <a:bodyPr wrap="square" rtlCol="0">
+            <a:spAutoFit/>
+          </a:bodyPr>
+          <a:lstStyle/>
+          <a:p>
+            <a:pPr algn="r"/>
+            <a:r>
+              <a:rPr lang="en-PH" sz="3600" b="1" i="1" dirty="0">
+                <a:solidFill>
+                  <a:srgbClr val="FD9116"/>
+                </a:solidFill>
+                <a:latin typeface="Times New Roman" panose="02020603050405020304" pitchFamily="18" charset="0"/>
+                <a:ea typeface="Malgun Gothic" panose="020B0503020000020004" pitchFamily="34" charset="-127"/>
+                <a:cs typeface="Times New Roman" panose="02020603050405020304" pitchFamily="18" charset="0"/>
+              </a:rPr>
+              <a:t>i</a:t>
+            </a:r>
+            <a:r>
+              <a:rPr lang="en-PH" sz="3600" b="1" i="1" baseline="-25000" dirty="0">
+                <a:solidFill>
+                  <a:srgbClr val="FD9116"/>
+                </a:solidFill>
+                <a:latin typeface="Times New Roman" panose="02020603050405020304" pitchFamily="18" charset="0"/>
+                <a:ea typeface="Malgun Gothic" panose="020B0503020000020004" pitchFamily="34" charset="-127"/>
+                <a:cs typeface="Times New Roman" panose="02020603050405020304" pitchFamily="18" charset="0"/>
+              </a:rPr>
+              <a:t>S</a:t>
+            </a:r>
+            <a:r>
+              <a:rPr lang="en-PH" sz="3600" b="1" baseline="-25000" dirty="0">
+                <a:solidFill>
+                  <a:srgbClr val="FD9116"/>
+                </a:solidFill>
+                <a:latin typeface="Times New Roman" panose="02020603050405020304" pitchFamily="18" charset="0"/>
+                <a:ea typeface="Malgun Gothic" panose="020B0503020000020004" pitchFamily="34" charset="-127"/>
+                <a:cs typeface="Times New Roman" panose="02020603050405020304" pitchFamily="18" charset="0"/>
+              </a:rPr>
+              <a:t>1</a:t>
+            </a:r>
+            <a:r>
+              <a:rPr lang="en-PH" sz="3600" b="1" baseline="-25000" dirty="0">
+                <a:latin typeface="Times New Roman" panose="02020603050405020304" pitchFamily="18" charset="0"/>
+                <a:ea typeface="Malgun Gothic" panose="020B0503020000020004" pitchFamily="34" charset="-127"/>
+                <a:cs typeface="Times New Roman" panose="02020603050405020304" pitchFamily="18" charset="0"/>
+              </a:rPr>
+              <a:t>,</a:t>
+            </a:r>
+            <a:r>
+              <a:rPr lang="en-PH" sz="3600" b="1" dirty="0">
+                <a:solidFill>
+                  <a:srgbClr val="E83154"/>
+                </a:solidFill>
+                <a:latin typeface="Times New Roman" panose="02020603050405020304" pitchFamily="18" charset="0"/>
+                <a:ea typeface="Malgun Gothic" panose="020B0503020000020004" pitchFamily="34" charset="-127"/>
+                <a:cs typeface="Times New Roman" panose="02020603050405020304" pitchFamily="18" charset="0"/>
+              </a:rPr>
+              <a:t> </a:t>
+            </a:r>
+            <a:r>
+              <a:rPr lang="en-PH" sz="3600" b="1" i="1" dirty="0">
+                <a:solidFill>
+                  <a:srgbClr val="2424B7"/>
+                </a:solidFill>
+                <a:latin typeface="Times New Roman" panose="02020603050405020304" pitchFamily="18" charset="0"/>
+                <a:ea typeface="Malgun Gothic" panose="020B0503020000020004" pitchFamily="34" charset="-127"/>
+                <a:cs typeface="Times New Roman" panose="02020603050405020304" pitchFamily="18" charset="0"/>
+              </a:rPr>
+              <a:t>i</a:t>
+            </a:r>
+            <a:r>
+              <a:rPr lang="en-PH" sz="3600" b="1" i="1" baseline="-25000" dirty="0">
+                <a:solidFill>
+                  <a:srgbClr val="2424B7"/>
+                </a:solidFill>
+                <a:latin typeface="Times New Roman" panose="02020603050405020304" pitchFamily="18" charset="0"/>
+                <a:ea typeface="Malgun Gothic" panose="020B0503020000020004" pitchFamily="34" charset="-127"/>
+                <a:cs typeface="Times New Roman" panose="02020603050405020304" pitchFamily="18" charset="0"/>
+              </a:rPr>
+              <a:t>S</a:t>
+            </a:r>
+            <a:r>
+              <a:rPr lang="en-PH" sz="3600" b="1" baseline="-25000" dirty="0">
+                <a:solidFill>
+                  <a:srgbClr val="2424B7"/>
+                </a:solidFill>
+                <a:latin typeface="Times New Roman" panose="02020603050405020304" pitchFamily="18" charset="0"/>
+                <a:ea typeface="Malgun Gothic" panose="020B0503020000020004" pitchFamily="34" charset="-127"/>
+                <a:cs typeface="Times New Roman" panose="02020603050405020304" pitchFamily="18" charset="0"/>
+              </a:rPr>
+              <a:t>2</a:t>
+            </a:r>
+          </a:p>
+        </p:txBody>
+      </p:sp>
+      <p:sp>
+        <p:nvSpPr>
+          <p:cNvPr id="56" name="TextBox 10">
+            <a:extLst>
+              <a:ext uri="{FF2B5EF4-FFF2-40B4-BE49-F238E27FC236}">
+                <a16:creationId xmlns:a16="http://schemas.microsoft.com/office/drawing/2014/main" id="{C87E9A89-C76E-D72E-E550-04D495610FC1}"/>
+              </a:ext>
+            </a:extLst>
+          </p:cNvPr>
+          <p:cNvSpPr txBox="1"/>
+          <p:nvPr/>
+        </p:nvSpPr>
+        <p:spPr>
+          <a:xfrm>
+            <a:off x="9391917" y="6469753"/>
+            <a:ext cx="2496981" cy="646331"/>
+          </a:xfrm>
+          <a:prstGeom prst="rect">
+            <a:avLst/>
+          </a:prstGeom>
+          <a:noFill/>
+        </p:spPr>
+        <p:txBody>
+          <a:bodyPr wrap="square" rtlCol="0">
+            <a:spAutoFit/>
+          </a:bodyPr>
+          <a:lstStyle/>
+          <a:p>
+            <a:pPr algn="r"/>
+            <a:r>
+              <a:rPr lang="en-PH" sz="3600" b="1" i="1" dirty="0">
+                <a:solidFill>
+                  <a:srgbClr val="D8469D"/>
+                </a:solidFill>
+                <a:latin typeface="Times New Roman" panose="02020603050405020304" pitchFamily="18" charset="0"/>
+                <a:ea typeface="Malgun Gothic" panose="020B0503020000020004" pitchFamily="34" charset="-127"/>
+                <a:cs typeface="Times New Roman" panose="02020603050405020304" pitchFamily="18" charset="0"/>
+              </a:rPr>
+              <a:t>i</a:t>
+            </a:r>
+            <a:r>
+              <a:rPr lang="en-PH" sz="3600" b="1" i="1" baseline="-25000" dirty="0">
+                <a:solidFill>
+                  <a:srgbClr val="D8469D"/>
+                </a:solidFill>
+                <a:latin typeface="Times New Roman" panose="02020603050405020304" pitchFamily="18" charset="0"/>
+                <a:ea typeface="Malgun Gothic" panose="020B0503020000020004" pitchFamily="34" charset="-127"/>
+                <a:cs typeface="Times New Roman" panose="02020603050405020304" pitchFamily="18" charset="0"/>
+              </a:rPr>
+              <a:t>D</a:t>
+            </a:r>
+            <a:r>
+              <a:rPr lang="en-PH" sz="3600" b="1" baseline="-25000" dirty="0">
+                <a:solidFill>
+                  <a:srgbClr val="D8469D"/>
+                </a:solidFill>
+                <a:latin typeface="Times New Roman" panose="02020603050405020304" pitchFamily="18" charset="0"/>
+                <a:ea typeface="Malgun Gothic" panose="020B0503020000020004" pitchFamily="34" charset="-127"/>
+                <a:cs typeface="Times New Roman" panose="02020603050405020304" pitchFamily="18" charset="0"/>
+              </a:rPr>
+              <a:t>1</a:t>
+            </a:r>
+            <a:r>
+              <a:rPr lang="en-PH" sz="3600" b="1" baseline="-25000" dirty="0">
+                <a:latin typeface="Times New Roman" panose="02020603050405020304" pitchFamily="18" charset="0"/>
+                <a:ea typeface="Malgun Gothic" panose="020B0503020000020004" pitchFamily="34" charset="-127"/>
+                <a:cs typeface="Times New Roman" panose="02020603050405020304" pitchFamily="18" charset="0"/>
+              </a:rPr>
+              <a:t>,</a:t>
+            </a:r>
+            <a:r>
+              <a:rPr lang="en-PH" sz="3600" b="1" dirty="0">
+                <a:solidFill>
+                  <a:srgbClr val="E83154"/>
+                </a:solidFill>
+                <a:latin typeface="Times New Roman" panose="02020603050405020304" pitchFamily="18" charset="0"/>
+                <a:ea typeface="Malgun Gothic" panose="020B0503020000020004" pitchFamily="34" charset="-127"/>
+                <a:cs typeface="Times New Roman" panose="02020603050405020304" pitchFamily="18" charset="0"/>
+              </a:rPr>
+              <a:t> </a:t>
+            </a:r>
+            <a:r>
+              <a:rPr lang="en-PH" sz="3600" b="1" i="1" dirty="0">
+                <a:solidFill>
+                  <a:srgbClr val="01D995"/>
+                </a:solidFill>
+                <a:latin typeface="Times New Roman" panose="02020603050405020304" pitchFamily="18" charset="0"/>
+                <a:ea typeface="Malgun Gothic" panose="020B0503020000020004" pitchFamily="34" charset="-127"/>
+                <a:cs typeface="Times New Roman" panose="02020603050405020304" pitchFamily="18" charset="0"/>
+              </a:rPr>
+              <a:t>i</a:t>
+            </a:r>
+            <a:r>
+              <a:rPr lang="en-PH" sz="3600" b="1" i="1" baseline="-25000" dirty="0">
+                <a:solidFill>
+                  <a:srgbClr val="01D995"/>
+                </a:solidFill>
+                <a:latin typeface="Times New Roman" panose="02020603050405020304" pitchFamily="18" charset="0"/>
+                <a:ea typeface="Malgun Gothic" panose="020B0503020000020004" pitchFamily="34" charset="-127"/>
+                <a:cs typeface="Times New Roman" panose="02020603050405020304" pitchFamily="18" charset="0"/>
+              </a:rPr>
+              <a:t>D</a:t>
+            </a:r>
+            <a:r>
+              <a:rPr lang="en-PH" sz="3600" b="1" baseline="-25000" dirty="0">
+                <a:solidFill>
+                  <a:srgbClr val="01D995"/>
+                </a:solidFill>
+                <a:latin typeface="Times New Roman" panose="02020603050405020304" pitchFamily="18" charset="0"/>
+                <a:ea typeface="Malgun Gothic" panose="020B0503020000020004" pitchFamily="34" charset="-127"/>
+                <a:cs typeface="Times New Roman" panose="02020603050405020304" pitchFamily="18" charset="0"/>
+              </a:rPr>
+              <a:t>2</a:t>
+            </a:r>
+          </a:p>
+        </p:txBody>
+      </p:sp>
+    </p:spTree>
+    <p:extLst>
+      <p:ext uri="{BB962C8B-B14F-4D97-AF65-F5344CB8AC3E}">
+        <p14:creationId xmlns:p14="http://schemas.microsoft.com/office/powerpoint/2010/main" val="2454660436"/>
+      </p:ext>
+    </p:extLst>
+  </p:cSld>
+  <p:clrMapOvr>
+    <a:masterClrMapping/>
+  </p:clrMapOvr>
+</p:sld>
+</file>
+
+<file path=ppt/slides/slide5.xml><?xml version="1.0" encoding="utf-8"?>
 <p:sld xmlns:a="http://schemas.openxmlformats.org/drawingml/2006/main" xmlns:r="http://schemas.openxmlformats.org/officeDocument/2006/relationships" xmlns:p="http://schemas.openxmlformats.org/presentationml/2006/main" show="0">
   <p:cSld>
     <p:spTree>
@@ -11697,8 +14147,8 @@
           </a:fontRef>
         </p:style>
       </p:cxnSp>
-      <mc:AlternateContent xmlns:mc="http://schemas.openxmlformats.org/markup-compatibility/2006">
-        <mc:Choice xmlns:a14="http://schemas.microsoft.com/office/drawing/2010/main" Requires="a14">
+      <mc:AlternateContent xmlns:mc="http://schemas.openxmlformats.org/markup-compatibility/2006" xmlns:a14="http://schemas.microsoft.com/office/drawing/2010/main">
+        <mc:Choice Requires="a14">
           <p:sp>
             <p:nvSpPr>
               <p:cNvPr id="57" name="TextBox 56">
@@ -11765,7 +14215,7 @@
             </p:txBody>
           </p:sp>
         </mc:Choice>
-        <mc:Fallback>
+        <mc:Fallback xmlns="">
           <p:sp>
             <p:nvSpPr>
               <p:cNvPr id="57" name="TextBox 56">
@@ -11823,7 +14273,7 @@
 </p:sld>
 </file>
 
-<file path=ppt/slides/slide5.xml><?xml version="1.0" encoding="utf-8"?>
+<file path=ppt/slides/slide6.xml><?xml version="1.0" encoding="utf-8"?>
 <p:sld xmlns:a="http://schemas.openxmlformats.org/drawingml/2006/main" xmlns:r="http://schemas.openxmlformats.org/officeDocument/2006/relationships" xmlns:p="http://schemas.openxmlformats.org/presentationml/2006/main" show="0">
   <p:cSld>
     <p:spTree>
@@ -13276,8 +15726,8 @@
           </a:fontRef>
         </p:style>
       </p:cxnSp>
-      <mc:AlternateContent xmlns:mc="http://schemas.openxmlformats.org/markup-compatibility/2006">
-        <mc:Choice xmlns:a14="http://schemas.microsoft.com/office/drawing/2010/main" Requires="a14">
+      <mc:AlternateContent xmlns:mc="http://schemas.openxmlformats.org/markup-compatibility/2006" xmlns:a14="http://schemas.microsoft.com/office/drawing/2010/main">
+        <mc:Choice Requires="a14">
           <p:sp>
             <p:nvSpPr>
               <p:cNvPr id="3" name="TextBox 2">
@@ -13344,7 +15794,7 @@
             </p:txBody>
           </p:sp>
         </mc:Choice>
-        <mc:Fallback>
+        <mc:Fallback xmlns="">
           <p:sp>
             <p:nvSpPr>
               <p:cNvPr id="3" name="TextBox 2">
@@ -13402,7 +15852,1666 @@
 </p:sld>
 </file>
 
-<file path=ppt/slides/slide6.xml><?xml version="1.0" encoding="utf-8"?>
+<file path=ppt/slides/slide7.xml><?xml version="1.0" encoding="utf-8"?>
+<p:sld xmlns:a="http://schemas.openxmlformats.org/drawingml/2006/main" xmlns:r="http://schemas.openxmlformats.org/officeDocument/2006/relationships" xmlns:p="http://schemas.openxmlformats.org/presentationml/2006/main" show="0">
+  <p:cSld>
+    <p:spTree>
+      <p:nvGrpSpPr>
+        <p:cNvPr id="1" name="">
+          <a:extLst>
+            <a:ext uri="{FF2B5EF4-FFF2-40B4-BE49-F238E27FC236}">
+              <a16:creationId xmlns:a16="http://schemas.microsoft.com/office/drawing/2014/main" id="{CBC357F8-2432-EF16-EB7C-D590E5BE48D1}"/>
+            </a:ext>
+          </a:extLst>
+        </p:cNvPr>
+        <p:cNvGrpSpPr/>
+        <p:nvPr/>
+      </p:nvGrpSpPr>
+      <p:grpSpPr>
+        <a:xfrm>
+          <a:off x="0" y="0"/>
+          <a:ext cx="0" cy="0"/>
+          <a:chOff x="0" y="0"/>
+          <a:chExt cx="0" cy="0"/>
+        </a:xfrm>
+      </p:grpSpPr>
+      <p:pic>
+        <p:nvPicPr>
+          <p:cNvPr id="6" name="Picture 5" descr="C5.&#10;&#10;AI-generated content may be incorrect.">
+            <a:extLst>
+              <a:ext uri="{FF2B5EF4-FFF2-40B4-BE49-F238E27FC236}">
+                <a16:creationId xmlns:a16="http://schemas.microsoft.com/office/drawing/2014/main" id="{5E2AA66D-D2F3-E42A-7A8C-7D6A52EA755C}"/>
+              </a:ext>
+            </a:extLst>
+          </p:cNvPr>
+          <p:cNvPicPr>
+            <a:picLocks noChangeAspect="1"/>
+          </p:cNvPicPr>
+          <p:nvPr/>
+        </p:nvPicPr>
+        <p:blipFill>
+          <a:blip r:embed="rId2"/>
+          <a:stretch>
+            <a:fillRect/>
+          </a:stretch>
+        </p:blipFill>
+        <p:spPr>
+          <a:xfrm>
+            <a:off x="0" y="954965"/>
+            <a:ext cx="12192000" cy="6873708"/>
+          </a:xfrm>
+          <a:prstGeom prst="rect">
+            <a:avLst/>
+          </a:prstGeom>
+        </p:spPr>
+      </p:pic>
+      <p:sp>
+        <p:nvSpPr>
+          <p:cNvPr id="5" name="テキスト プレースホルダー 2">
+            <a:extLst>
+              <a:ext uri="{FF2B5EF4-FFF2-40B4-BE49-F238E27FC236}">
+                <a16:creationId xmlns:a16="http://schemas.microsoft.com/office/drawing/2014/main" id="{5FE6EEB1-A89B-5DA0-CA60-3478B5D82662}"/>
+              </a:ext>
+            </a:extLst>
+          </p:cNvPr>
+          <p:cNvSpPr txBox="1">
+            <a:spLocks/>
+          </p:cNvSpPr>
+          <p:nvPr/>
+        </p:nvSpPr>
+        <p:spPr>
+          <a:xfrm>
+            <a:off x="350158" y="2151655"/>
+            <a:ext cx="6736442" cy="4964949"/>
+          </a:xfrm>
+          <a:prstGeom prst="rect">
+            <a:avLst/>
+          </a:prstGeom>
+        </p:spPr>
+        <p:txBody>
+          <a:bodyPr vert="horz" lIns="91440" tIns="45720" rIns="91440" bIns="45720" numCol="1" spcCol="828000" rtlCol="0">
+            <a:normAutofit/>
+          </a:bodyPr>
+          <a:lstStyle>
+            <a:lvl1pPr marL="228600" indent="-228600" algn="l" defTabSz="914400" rtl="0" eaLnBrk="1" latinLnBrk="0" hangingPunct="1">
+              <a:lnSpc>
+                <a:spcPct val="90000"/>
+              </a:lnSpc>
+              <a:spcBef>
+                <a:spcPts val="1000"/>
+              </a:spcBef>
+              <a:buFont typeface="Arial" panose="020B0604020202020204" pitchFamily="34" charset="0"/>
+              <a:buChar char="•"/>
+              <a:defRPr sz="2800" kern="1200">
+                <a:solidFill>
+                  <a:schemeClr val="tx1"/>
+                </a:solidFill>
+                <a:latin typeface="+mn-lt"/>
+                <a:ea typeface="+mn-ea"/>
+                <a:cs typeface="+mn-cs"/>
+              </a:defRPr>
+            </a:lvl1pPr>
+            <a:lvl2pPr marL="685800" indent="-228600" algn="l" defTabSz="914400" rtl="0" eaLnBrk="1" latinLnBrk="0" hangingPunct="1">
+              <a:lnSpc>
+                <a:spcPct val="90000"/>
+              </a:lnSpc>
+              <a:spcBef>
+                <a:spcPts val="500"/>
+              </a:spcBef>
+              <a:buFont typeface="Arial" panose="020B0604020202020204" pitchFamily="34" charset="0"/>
+              <a:buChar char="•"/>
+              <a:defRPr sz="2400" kern="1200">
+                <a:solidFill>
+                  <a:schemeClr val="tx1"/>
+                </a:solidFill>
+                <a:latin typeface="+mn-lt"/>
+                <a:ea typeface="+mn-ea"/>
+                <a:cs typeface="+mn-cs"/>
+              </a:defRPr>
+            </a:lvl2pPr>
+            <a:lvl3pPr marL="1143000" indent="-228600" algn="l" defTabSz="914400" rtl="0" eaLnBrk="1" latinLnBrk="0" hangingPunct="1">
+              <a:lnSpc>
+                <a:spcPct val="90000"/>
+              </a:lnSpc>
+              <a:spcBef>
+                <a:spcPts val="500"/>
+              </a:spcBef>
+              <a:buFont typeface="Arial" panose="020B0604020202020204" pitchFamily="34" charset="0"/>
+              <a:buChar char="•"/>
+              <a:defRPr sz="2000" kern="1200">
+                <a:solidFill>
+                  <a:schemeClr val="tx1"/>
+                </a:solidFill>
+                <a:latin typeface="+mn-lt"/>
+                <a:ea typeface="+mn-ea"/>
+                <a:cs typeface="+mn-cs"/>
+              </a:defRPr>
+            </a:lvl3pPr>
+            <a:lvl4pPr marL="1600200" indent="-228600" algn="l" defTabSz="914400" rtl="0" eaLnBrk="1" latinLnBrk="0" hangingPunct="1">
+              <a:lnSpc>
+                <a:spcPct val="90000"/>
+              </a:lnSpc>
+              <a:spcBef>
+                <a:spcPts val="500"/>
+              </a:spcBef>
+              <a:buFont typeface="Arial" panose="020B0604020202020204" pitchFamily="34" charset="0"/>
+              <a:buChar char="•"/>
+              <a:defRPr sz="1800" kern="1200">
+                <a:solidFill>
+                  <a:schemeClr val="tx1"/>
+                </a:solidFill>
+                <a:latin typeface="+mn-lt"/>
+                <a:ea typeface="+mn-ea"/>
+                <a:cs typeface="+mn-cs"/>
+              </a:defRPr>
+            </a:lvl4pPr>
+            <a:lvl5pPr marL="2057400" indent="-228600" algn="l" defTabSz="914400" rtl="0" eaLnBrk="1" latinLnBrk="0" hangingPunct="1">
+              <a:lnSpc>
+                <a:spcPct val="90000"/>
+              </a:lnSpc>
+              <a:spcBef>
+                <a:spcPts val="500"/>
+              </a:spcBef>
+              <a:buFont typeface="Arial" panose="020B0604020202020204" pitchFamily="34" charset="0"/>
+              <a:buChar char="•"/>
+              <a:defRPr sz="1800" kern="1200">
+                <a:solidFill>
+                  <a:schemeClr val="tx1"/>
+                </a:solidFill>
+                <a:latin typeface="+mn-lt"/>
+                <a:ea typeface="+mn-ea"/>
+                <a:cs typeface="+mn-cs"/>
+              </a:defRPr>
+            </a:lvl5pPr>
+            <a:lvl6pPr marL="2514600" indent="-228600" algn="l" defTabSz="914400" rtl="0" eaLnBrk="1" latinLnBrk="0" hangingPunct="1">
+              <a:lnSpc>
+                <a:spcPct val="90000"/>
+              </a:lnSpc>
+              <a:spcBef>
+                <a:spcPts val="500"/>
+              </a:spcBef>
+              <a:buFont typeface="Arial" panose="020B0604020202020204" pitchFamily="34" charset="0"/>
+              <a:buChar char="•"/>
+              <a:defRPr sz="1800" kern="1200">
+                <a:solidFill>
+                  <a:schemeClr val="tx1"/>
+                </a:solidFill>
+                <a:latin typeface="+mn-lt"/>
+                <a:ea typeface="+mn-ea"/>
+                <a:cs typeface="+mn-cs"/>
+              </a:defRPr>
+            </a:lvl6pPr>
+            <a:lvl7pPr marL="2971800" indent="-228600" algn="l" defTabSz="914400" rtl="0" eaLnBrk="1" latinLnBrk="0" hangingPunct="1">
+              <a:lnSpc>
+                <a:spcPct val="90000"/>
+              </a:lnSpc>
+              <a:spcBef>
+                <a:spcPts val="500"/>
+              </a:spcBef>
+              <a:buFont typeface="Arial" panose="020B0604020202020204" pitchFamily="34" charset="0"/>
+              <a:buChar char="•"/>
+              <a:defRPr sz="1800" kern="1200">
+                <a:solidFill>
+                  <a:schemeClr val="tx1"/>
+                </a:solidFill>
+                <a:latin typeface="+mn-lt"/>
+                <a:ea typeface="+mn-ea"/>
+                <a:cs typeface="+mn-cs"/>
+              </a:defRPr>
+            </a:lvl7pPr>
+            <a:lvl8pPr marL="3429000" indent="-228600" algn="l" defTabSz="914400" rtl="0" eaLnBrk="1" latinLnBrk="0" hangingPunct="1">
+              <a:lnSpc>
+                <a:spcPct val="90000"/>
+              </a:lnSpc>
+              <a:spcBef>
+                <a:spcPts val="500"/>
+              </a:spcBef>
+              <a:buFont typeface="Arial" panose="020B0604020202020204" pitchFamily="34" charset="0"/>
+              <a:buChar char="•"/>
+              <a:defRPr sz="1800" kern="1200">
+                <a:solidFill>
+                  <a:schemeClr val="tx1"/>
+                </a:solidFill>
+                <a:latin typeface="+mn-lt"/>
+                <a:ea typeface="+mn-ea"/>
+                <a:cs typeface="+mn-cs"/>
+              </a:defRPr>
+            </a:lvl8pPr>
+            <a:lvl9pPr marL="3886200" indent="-228600" algn="l" defTabSz="914400" rtl="0" eaLnBrk="1" latinLnBrk="0" hangingPunct="1">
+              <a:lnSpc>
+                <a:spcPct val="90000"/>
+              </a:lnSpc>
+              <a:spcBef>
+                <a:spcPts val="500"/>
+              </a:spcBef>
+              <a:buFont typeface="Arial" panose="020B0604020202020204" pitchFamily="34" charset="0"/>
+              <a:buChar char="•"/>
+              <a:defRPr sz="1800" kern="1200">
+                <a:solidFill>
+                  <a:schemeClr val="tx1"/>
+                </a:solidFill>
+                <a:latin typeface="+mn-lt"/>
+                <a:ea typeface="+mn-ea"/>
+                <a:cs typeface="+mn-cs"/>
+              </a:defRPr>
+            </a:lvl9pPr>
+          </a:lstStyle>
+          <a:p>
+            <a:pPr marL="0" indent="0" algn="just">
+              <a:buNone/>
+            </a:pPr>
+            <a:endParaRPr kumimoji="1" lang="en-PH" altLang="ja-JP" b="1">
+              <a:latin typeface="Times New Roman" panose="02020603050405020304" pitchFamily="18" charset="0"/>
+              <a:ea typeface="Malgun Gothic" panose="020B0503020000020004" pitchFamily="34" charset="-127"/>
+              <a:cs typeface="Times New Roman" panose="02020603050405020304" pitchFamily="18" charset="0"/>
+            </a:endParaRPr>
+          </a:p>
+        </p:txBody>
+      </p:sp>
+      <p:cxnSp>
+        <p:nvCxnSpPr>
+          <p:cNvPr id="8" name="Straight Arrow Connector 7">
+            <a:extLst>
+              <a:ext uri="{FF2B5EF4-FFF2-40B4-BE49-F238E27FC236}">
+                <a16:creationId xmlns:a16="http://schemas.microsoft.com/office/drawing/2014/main" id="{2A45CB7D-8D99-F3DC-1552-C2B987596AD0}"/>
+              </a:ext>
+            </a:extLst>
+          </p:cNvPr>
+          <p:cNvCxnSpPr>
+            <a:cxnSpLocks/>
+          </p:cNvCxnSpPr>
+          <p:nvPr/>
+        </p:nvCxnSpPr>
+        <p:spPr>
+          <a:xfrm>
+            <a:off x="770512" y="3365334"/>
+            <a:ext cx="2939965" cy="0"/>
+          </a:xfrm>
+          <a:prstGeom prst="straightConnector1">
+            <a:avLst/>
+          </a:prstGeom>
+          <a:ln w="38100">
+            <a:solidFill>
+              <a:schemeClr val="tx1"/>
+            </a:solidFill>
+            <a:headEnd type="triangle"/>
+            <a:tailEnd type="triangle"/>
+          </a:ln>
+        </p:spPr>
+        <p:style>
+          <a:lnRef idx="1">
+            <a:schemeClr val="accent1"/>
+          </a:lnRef>
+          <a:fillRef idx="0">
+            <a:schemeClr val="accent1"/>
+          </a:fillRef>
+          <a:effectRef idx="0">
+            <a:schemeClr val="accent1"/>
+          </a:effectRef>
+          <a:fontRef idx="minor">
+            <a:schemeClr val="tx1"/>
+          </a:fontRef>
+        </p:style>
+      </p:cxnSp>
+      <mc:AlternateContent xmlns:mc="http://schemas.openxmlformats.org/markup-compatibility/2006" xmlns:a14="http://schemas.microsoft.com/office/drawing/2010/main">
+        <mc:Choice Requires="a14">
+          <p:sp>
+            <p:nvSpPr>
+              <p:cNvPr id="9" name="TextBox 8">
+                <a:extLst>
+                  <a:ext uri="{FF2B5EF4-FFF2-40B4-BE49-F238E27FC236}">
+                    <a16:creationId xmlns:a16="http://schemas.microsoft.com/office/drawing/2014/main" id="{D7B0AC22-CF1D-7796-3C53-8A40FCCA2C9F}"/>
+                  </a:ext>
+                </a:extLst>
+              </p:cNvPr>
+              <p:cNvSpPr txBox="1"/>
+              <p:nvPr/>
+            </p:nvSpPr>
+            <p:spPr>
+              <a:xfrm>
+                <a:off x="806458" y="2815571"/>
+                <a:ext cx="2904019" cy="461665"/>
+              </a:xfrm>
+              <a:prstGeom prst="rect">
+                <a:avLst/>
+              </a:prstGeom>
+              <a:noFill/>
+            </p:spPr>
+            <p:txBody>
+              <a:bodyPr wrap="square" rtlCol="0">
+                <a:spAutoFit/>
+              </a:bodyPr>
+              <a:lstStyle/>
+              <a:p>
+                <a:pPr algn="ctr"/>
+                <a:r>
+                  <a:rPr lang="en-US" sz="2400" b="1" dirty="0">
+                    <a:latin typeface="Times New Roman" panose="02020603050405020304" pitchFamily="18" charset="0"/>
+                    <a:ea typeface="Malgun Gothic" panose="020B0503020000020004" pitchFamily="34" charset="-127"/>
+                    <a:cs typeface="Times New Roman" panose="02020603050405020304" pitchFamily="18" charset="0"/>
+                  </a:rPr>
+                  <a:t>½ </a:t>
+                </a:r>
+                <a:r>
+                  <a:rPr lang="en-US" sz="2400" b="1" i="1" dirty="0">
+                    <a:latin typeface="Times New Roman" panose="02020603050405020304" pitchFamily="18" charset="0"/>
+                    <a:ea typeface="Malgun Gothic" panose="020B0503020000020004" pitchFamily="34" charset="-127"/>
+                    <a:cs typeface="Times New Roman" panose="02020603050405020304" pitchFamily="18" charset="0"/>
+                  </a:rPr>
+                  <a:t>T</a:t>
+                </a:r>
+                <a:r>
+                  <a:rPr lang="en-US" sz="2400" b="1" baseline="-25000" dirty="0">
+                    <a:latin typeface="Times New Roman" panose="02020603050405020304" pitchFamily="18" charset="0"/>
+                    <a:ea typeface="Malgun Gothic" panose="020B0503020000020004" pitchFamily="34" charset="-127"/>
+                    <a:cs typeface="Times New Roman" panose="02020603050405020304" pitchFamily="18" charset="0"/>
+                  </a:rPr>
+                  <a:t>s</a:t>
+                </a:r>
+                <a:r>
+                  <a:rPr lang="en-US" sz="2400" b="1" dirty="0">
+                    <a:latin typeface="Times New Roman" panose="02020603050405020304" pitchFamily="18" charset="0"/>
+                    <a:ea typeface="Malgun Gothic" panose="020B0503020000020004" pitchFamily="34" charset="-127"/>
+                    <a:cs typeface="Times New Roman" panose="02020603050405020304" pitchFamily="18" charset="0"/>
+                  </a:rPr>
+                  <a:t> (5</a:t>
+                </a:r>
+                <a14:m>
+                  <m:oMath xmlns:m="http://schemas.openxmlformats.org/officeDocument/2006/math">
+                    <m:r>
+                      <a:rPr lang="en-PH" sz="2400" b="1">
+                        <a:latin typeface="Cambria Math" panose="02040503050406030204" pitchFamily="18" charset="0"/>
+                        <a:ea typeface="Malgun Gothic" panose="020B0503020000020004" pitchFamily="34" charset="-127"/>
+                        <a:cs typeface="Times New Roman" panose="02020603050405020304" pitchFamily="18" charset="0"/>
+                      </a:rPr>
+                      <m:t> </m:t>
+                    </m:r>
+                    <m:r>
+                      <a:rPr lang="en-US" sz="2400" b="1" i="1">
+                        <a:latin typeface="Cambria Math" panose="02040503050406030204" pitchFamily="18" charset="0"/>
+                        <a:ea typeface="Malgun Gothic" panose="020B0503020000020004" pitchFamily="34" charset="-127"/>
+                        <a:cs typeface="Times New Roman" panose="02020603050405020304" pitchFamily="18" charset="0"/>
+                      </a:rPr>
+                      <m:t>𝝁</m:t>
+                    </m:r>
+                  </m:oMath>
+                </a14:m>
+                <a:r>
+                  <a:rPr lang="en-PH" sz="2400" b="1" dirty="0">
+                    <a:latin typeface="Times New Roman" panose="02020603050405020304" pitchFamily="18" charset="0"/>
+                    <a:ea typeface="Malgun Gothic" panose="020B0503020000020004" pitchFamily="34" charset="-127"/>
+                    <a:cs typeface="Times New Roman" panose="02020603050405020304" pitchFamily="18" charset="0"/>
+                  </a:rPr>
+                  <a:t>s)</a:t>
+                </a:r>
+              </a:p>
+            </p:txBody>
+          </p:sp>
+        </mc:Choice>
+        <mc:Fallback xmlns="">
+          <p:sp>
+            <p:nvSpPr>
+              <p:cNvPr id="9" name="TextBox 8">
+                <a:extLst>
+                  <a:ext uri="{FF2B5EF4-FFF2-40B4-BE49-F238E27FC236}">
+                    <a16:creationId xmlns:a16="http://schemas.microsoft.com/office/drawing/2014/main" id="{8D309697-9BA3-F73C-088B-92B628248CDB}"/>
+                  </a:ext>
+                </a:extLst>
+              </p:cNvPr>
+              <p:cNvSpPr txBox="1">
+                <a:spLocks noRot="1" noChangeAspect="1" noMove="1" noResize="1" noEditPoints="1" noAdjustHandles="1" noChangeArrowheads="1" noChangeShapeType="1" noTextEdit="1"/>
+              </p:cNvSpPr>
+              <p:nvPr/>
+            </p:nvSpPr>
+            <p:spPr>
+              <a:xfrm>
+                <a:off x="806458" y="2815571"/>
+                <a:ext cx="2904019" cy="461665"/>
+              </a:xfrm>
+              <a:prstGeom prst="rect">
+                <a:avLst/>
+              </a:prstGeom>
+              <a:blipFill>
+                <a:blip r:embed="rId4"/>
+                <a:stretch>
+                  <a:fillRect t="-10526" b="-28947"/>
+                </a:stretch>
+              </a:blipFill>
+            </p:spPr>
+            <p:txBody>
+              <a:bodyPr/>
+              <a:lstStyle/>
+              <a:p>
+                <a:r>
+                  <a:rPr lang="en-US">
+                    <a:noFill/>
+                  </a:rPr>
+                  <a:t> </a:t>
+                </a:r>
+              </a:p>
+            </p:txBody>
+          </p:sp>
+        </mc:Fallback>
+      </mc:AlternateContent>
+      <p:cxnSp>
+        <p:nvCxnSpPr>
+          <p:cNvPr id="17" name="Straight Connector 16">
+            <a:extLst>
+              <a:ext uri="{FF2B5EF4-FFF2-40B4-BE49-F238E27FC236}">
+                <a16:creationId xmlns:a16="http://schemas.microsoft.com/office/drawing/2014/main" id="{20FD29FB-8431-0214-0ABA-BE95B07C58FA}"/>
+              </a:ext>
+            </a:extLst>
+          </p:cNvPr>
+          <p:cNvCxnSpPr>
+            <a:cxnSpLocks/>
+          </p:cNvCxnSpPr>
+          <p:nvPr/>
+        </p:nvCxnSpPr>
+        <p:spPr>
+          <a:xfrm>
+            <a:off x="721974" y="3365334"/>
+            <a:ext cx="0" cy="2675400"/>
+          </a:xfrm>
+          <a:prstGeom prst="line">
+            <a:avLst/>
+          </a:prstGeom>
+          <a:ln w="19050">
+            <a:solidFill>
+              <a:srgbClr val="FF0000"/>
+            </a:solidFill>
+            <a:prstDash val="dash"/>
+          </a:ln>
+        </p:spPr>
+        <p:style>
+          <a:lnRef idx="1">
+            <a:schemeClr val="accent1"/>
+          </a:lnRef>
+          <a:fillRef idx="0">
+            <a:schemeClr val="accent1"/>
+          </a:fillRef>
+          <a:effectRef idx="0">
+            <a:schemeClr val="accent1"/>
+          </a:effectRef>
+          <a:fontRef idx="minor">
+            <a:schemeClr val="tx1"/>
+          </a:fontRef>
+        </p:style>
+      </p:cxnSp>
+      <p:cxnSp>
+        <p:nvCxnSpPr>
+          <p:cNvPr id="18" name="Straight Connector 17">
+            <a:extLst>
+              <a:ext uri="{FF2B5EF4-FFF2-40B4-BE49-F238E27FC236}">
+                <a16:creationId xmlns:a16="http://schemas.microsoft.com/office/drawing/2014/main" id="{33B63365-F560-8243-5C13-90B645EE258C}"/>
+              </a:ext>
+            </a:extLst>
+          </p:cNvPr>
+          <p:cNvCxnSpPr>
+            <a:cxnSpLocks/>
+          </p:cNvCxnSpPr>
+          <p:nvPr/>
+        </p:nvCxnSpPr>
+        <p:spPr>
+          <a:xfrm>
+            <a:off x="3761276" y="3365334"/>
+            <a:ext cx="0" cy="2675400"/>
+          </a:xfrm>
+          <a:prstGeom prst="line">
+            <a:avLst/>
+          </a:prstGeom>
+          <a:ln w="19050">
+            <a:solidFill>
+              <a:srgbClr val="FF0000"/>
+            </a:solidFill>
+            <a:prstDash val="dash"/>
+          </a:ln>
+        </p:spPr>
+        <p:style>
+          <a:lnRef idx="1">
+            <a:schemeClr val="accent1"/>
+          </a:lnRef>
+          <a:fillRef idx="0">
+            <a:schemeClr val="accent1"/>
+          </a:fillRef>
+          <a:effectRef idx="0">
+            <a:schemeClr val="accent1"/>
+          </a:effectRef>
+          <a:fontRef idx="minor">
+            <a:schemeClr val="tx1"/>
+          </a:fontRef>
+        </p:style>
+      </p:cxnSp>
+      <p:cxnSp>
+        <p:nvCxnSpPr>
+          <p:cNvPr id="23" name="Straight Connector 22">
+            <a:extLst>
+              <a:ext uri="{FF2B5EF4-FFF2-40B4-BE49-F238E27FC236}">
+                <a16:creationId xmlns:a16="http://schemas.microsoft.com/office/drawing/2014/main" id="{D294E277-A3A2-2AFB-CB60-E4756A7AEF2E}"/>
+              </a:ext>
+            </a:extLst>
+          </p:cNvPr>
+          <p:cNvCxnSpPr>
+            <a:cxnSpLocks/>
+          </p:cNvCxnSpPr>
+          <p:nvPr/>
+        </p:nvCxnSpPr>
+        <p:spPr>
+          <a:xfrm>
+            <a:off x="7063450" y="3363555"/>
+            <a:ext cx="0" cy="2664100"/>
+          </a:xfrm>
+          <a:prstGeom prst="line">
+            <a:avLst/>
+          </a:prstGeom>
+          <a:ln w="19050">
+            <a:solidFill>
+              <a:srgbClr val="FF0000"/>
+            </a:solidFill>
+            <a:prstDash val="dash"/>
+          </a:ln>
+        </p:spPr>
+        <p:style>
+          <a:lnRef idx="1">
+            <a:schemeClr val="accent1"/>
+          </a:lnRef>
+          <a:fillRef idx="0">
+            <a:schemeClr val="accent1"/>
+          </a:fillRef>
+          <a:effectRef idx="0">
+            <a:schemeClr val="accent1"/>
+          </a:effectRef>
+          <a:fontRef idx="minor">
+            <a:schemeClr val="tx1"/>
+          </a:fontRef>
+        </p:style>
+      </p:cxnSp>
+      <p:grpSp>
+        <p:nvGrpSpPr>
+          <p:cNvPr id="24" name="Group 23">
+            <a:extLst>
+              <a:ext uri="{FF2B5EF4-FFF2-40B4-BE49-F238E27FC236}">
+                <a16:creationId xmlns:a16="http://schemas.microsoft.com/office/drawing/2014/main" id="{1E780B03-0BA6-2E4D-F936-3A05EF0525A8}"/>
+              </a:ext>
+            </a:extLst>
+          </p:cNvPr>
+          <p:cNvGrpSpPr/>
+          <p:nvPr/>
+        </p:nvGrpSpPr>
+        <p:grpSpPr>
+          <a:xfrm>
+            <a:off x="790575" y="3647283"/>
+            <a:ext cx="3239161" cy="461665"/>
+            <a:chOff x="3114890" y="2684463"/>
+            <a:chExt cx="4123274" cy="461665"/>
+          </a:xfrm>
+        </p:grpSpPr>
+        <p:sp>
+          <p:nvSpPr>
+            <p:cNvPr id="25" name="TextBox 24">
+              <a:extLst>
+                <a:ext uri="{FF2B5EF4-FFF2-40B4-BE49-F238E27FC236}">
+                  <a16:creationId xmlns:a16="http://schemas.microsoft.com/office/drawing/2014/main" id="{A3B041B0-66F1-6773-8CCE-FC51C3A30BFD}"/>
+                </a:ext>
+              </a:extLst>
+            </p:cNvPr>
+            <p:cNvSpPr txBox="1"/>
+            <p:nvPr/>
+          </p:nvSpPr>
+          <p:spPr>
+            <a:xfrm>
+              <a:off x="3750407" y="2684463"/>
+              <a:ext cx="2904019" cy="461665"/>
+            </a:xfrm>
+            <a:prstGeom prst="rect">
+              <a:avLst/>
+            </a:prstGeom>
+            <a:noFill/>
+          </p:spPr>
+          <p:txBody>
+            <a:bodyPr wrap="square" rtlCol="0">
+              <a:spAutoFit/>
+            </a:bodyPr>
+            <a:lstStyle/>
+            <a:p>
+              <a:pPr algn="ctr"/>
+              <a:r>
+                <a:rPr lang="en-US" sz="2400" b="1" i="1" dirty="0">
+                  <a:latin typeface="Times New Roman" panose="02020603050405020304" pitchFamily="18" charset="0"/>
+                  <a:ea typeface="Malgun Gothic" panose="020B0503020000020004" pitchFamily="34" charset="-127"/>
+                  <a:cs typeface="Times New Roman" panose="02020603050405020304" pitchFamily="18" charset="0"/>
+                </a:rPr>
+                <a:t>S</a:t>
+              </a:r>
+              <a:r>
+                <a:rPr lang="en-US" sz="2400" b="1" baseline="-25000" dirty="0">
+                  <a:latin typeface="Times New Roman" panose="02020603050405020304" pitchFamily="18" charset="0"/>
+                  <a:ea typeface="Malgun Gothic" panose="020B0503020000020004" pitchFamily="34" charset="-127"/>
+                  <a:cs typeface="Times New Roman" panose="02020603050405020304" pitchFamily="18" charset="0"/>
+                </a:rPr>
+                <a:t>1 </a:t>
+              </a:r>
+              <a:r>
+                <a:rPr lang="en-US" sz="2400" dirty="0">
+                  <a:latin typeface="Times New Roman" panose="02020603050405020304" pitchFamily="18" charset="0"/>
+                  <a:ea typeface="Malgun Gothic" panose="020B0503020000020004" pitchFamily="34" charset="-127"/>
+                  <a:cs typeface="Times New Roman" panose="02020603050405020304" pitchFamily="18" charset="0"/>
+                </a:rPr>
+                <a:t>OFF</a:t>
+              </a:r>
+              <a:endParaRPr lang="en-PH" sz="2400" b="1" dirty="0">
+                <a:latin typeface="Times New Roman" panose="02020603050405020304" pitchFamily="18" charset="0"/>
+                <a:ea typeface="Malgun Gothic" panose="020B0503020000020004" pitchFamily="34" charset="-127"/>
+                <a:cs typeface="Times New Roman" panose="02020603050405020304" pitchFamily="18" charset="0"/>
+              </a:endParaRPr>
+            </a:p>
+          </p:txBody>
+        </p:sp>
+        <p:cxnSp>
+          <p:nvCxnSpPr>
+            <p:cNvPr id="26" name="Straight Arrow Connector 25">
+              <a:extLst>
+                <a:ext uri="{FF2B5EF4-FFF2-40B4-BE49-F238E27FC236}">
+                  <a16:creationId xmlns:a16="http://schemas.microsoft.com/office/drawing/2014/main" id="{98EB73F5-DE19-F8A7-9F15-31DAB921BBD9}"/>
+                </a:ext>
+              </a:extLst>
+            </p:cNvPr>
+            <p:cNvCxnSpPr>
+              <a:cxnSpLocks/>
+            </p:cNvCxnSpPr>
+            <p:nvPr/>
+          </p:nvCxnSpPr>
+          <p:spPr>
+            <a:xfrm flipH="1">
+              <a:off x="3114890" y="3007628"/>
+              <a:ext cx="1079247" cy="0"/>
+            </a:xfrm>
+            <a:prstGeom prst="straightConnector1">
+              <a:avLst/>
+            </a:prstGeom>
+            <a:ln w="38100">
+              <a:solidFill>
+                <a:schemeClr val="tx1"/>
+              </a:solidFill>
+              <a:tailEnd type="triangle"/>
+            </a:ln>
+          </p:spPr>
+          <p:style>
+            <a:lnRef idx="1">
+              <a:schemeClr val="accent1"/>
+            </a:lnRef>
+            <a:fillRef idx="0">
+              <a:schemeClr val="accent1"/>
+            </a:fillRef>
+            <a:effectRef idx="0">
+              <a:schemeClr val="accent1"/>
+            </a:effectRef>
+            <a:fontRef idx="minor">
+              <a:schemeClr val="tx1"/>
+            </a:fontRef>
+          </p:style>
+        </p:cxnSp>
+        <p:cxnSp>
+          <p:nvCxnSpPr>
+            <p:cNvPr id="27" name="Straight Arrow Connector 26">
+              <a:extLst>
+                <a:ext uri="{FF2B5EF4-FFF2-40B4-BE49-F238E27FC236}">
+                  <a16:creationId xmlns:a16="http://schemas.microsoft.com/office/drawing/2014/main" id="{2DF32D88-1F8E-B74E-08DC-A3B33BBB9C6A}"/>
+                </a:ext>
+              </a:extLst>
+            </p:cNvPr>
+            <p:cNvCxnSpPr>
+              <a:cxnSpLocks/>
+            </p:cNvCxnSpPr>
+            <p:nvPr/>
+          </p:nvCxnSpPr>
+          <p:spPr>
+            <a:xfrm>
+              <a:off x="6175100" y="3007628"/>
+              <a:ext cx="1063064" cy="0"/>
+            </a:xfrm>
+            <a:prstGeom prst="straightConnector1">
+              <a:avLst/>
+            </a:prstGeom>
+            <a:ln w="38100">
+              <a:solidFill>
+                <a:schemeClr val="tx1"/>
+              </a:solidFill>
+              <a:tailEnd type="triangle"/>
+            </a:ln>
+          </p:spPr>
+          <p:style>
+            <a:lnRef idx="1">
+              <a:schemeClr val="accent1"/>
+            </a:lnRef>
+            <a:fillRef idx="0">
+              <a:schemeClr val="accent1"/>
+            </a:fillRef>
+            <a:effectRef idx="0">
+              <a:schemeClr val="accent1"/>
+            </a:effectRef>
+            <a:fontRef idx="minor">
+              <a:schemeClr val="tx1"/>
+            </a:fontRef>
+          </p:style>
+        </p:cxnSp>
+      </p:grpSp>
+      <p:cxnSp>
+        <p:nvCxnSpPr>
+          <p:cNvPr id="28" name="Straight Connector 27">
+            <a:extLst>
+              <a:ext uri="{FF2B5EF4-FFF2-40B4-BE49-F238E27FC236}">
+                <a16:creationId xmlns:a16="http://schemas.microsoft.com/office/drawing/2014/main" id="{AF2C0D12-D4FF-3269-80A8-2055E5D5C867}"/>
+              </a:ext>
+            </a:extLst>
+          </p:cNvPr>
+          <p:cNvCxnSpPr>
+            <a:cxnSpLocks/>
+          </p:cNvCxnSpPr>
+          <p:nvPr/>
+        </p:nvCxnSpPr>
+        <p:spPr>
+          <a:xfrm>
+            <a:off x="4078779" y="3722953"/>
+            <a:ext cx="0" cy="2304703"/>
+          </a:xfrm>
+          <a:prstGeom prst="line">
+            <a:avLst/>
+          </a:prstGeom>
+          <a:ln w="19050">
+            <a:solidFill>
+              <a:srgbClr val="FF0000"/>
+            </a:solidFill>
+            <a:prstDash val="dash"/>
+          </a:ln>
+        </p:spPr>
+        <p:style>
+          <a:lnRef idx="1">
+            <a:schemeClr val="accent1"/>
+          </a:lnRef>
+          <a:fillRef idx="0">
+            <a:schemeClr val="accent1"/>
+          </a:fillRef>
+          <a:effectRef idx="0">
+            <a:schemeClr val="accent1"/>
+          </a:effectRef>
+          <a:fontRef idx="minor">
+            <a:schemeClr val="tx1"/>
+          </a:fontRef>
+        </p:style>
+      </p:cxnSp>
+      <p:grpSp>
+        <p:nvGrpSpPr>
+          <p:cNvPr id="29" name="Group 28">
+            <a:extLst>
+              <a:ext uri="{FF2B5EF4-FFF2-40B4-BE49-F238E27FC236}">
+                <a16:creationId xmlns:a16="http://schemas.microsoft.com/office/drawing/2014/main" id="{E6650DB7-62BD-5976-F2C2-6ED9719F4582}"/>
+              </a:ext>
+            </a:extLst>
+          </p:cNvPr>
+          <p:cNvGrpSpPr/>
+          <p:nvPr/>
+        </p:nvGrpSpPr>
+        <p:grpSpPr>
+          <a:xfrm>
+            <a:off x="3794166" y="3040391"/>
+            <a:ext cx="3242386" cy="461665"/>
+            <a:chOff x="6162416" y="2431239"/>
+            <a:chExt cx="4123274" cy="461665"/>
+          </a:xfrm>
+        </p:grpSpPr>
+        <p:sp>
+          <p:nvSpPr>
+            <p:cNvPr id="30" name="TextBox 29">
+              <a:extLst>
+                <a:ext uri="{FF2B5EF4-FFF2-40B4-BE49-F238E27FC236}">
+                  <a16:creationId xmlns:a16="http://schemas.microsoft.com/office/drawing/2014/main" id="{EFA44B4C-1648-0DEB-2F1D-7D89800640AA}"/>
+                </a:ext>
+              </a:extLst>
+            </p:cNvPr>
+            <p:cNvSpPr txBox="1"/>
+            <p:nvPr/>
+          </p:nvSpPr>
+          <p:spPr>
+            <a:xfrm>
+              <a:off x="6797932" y="2431239"/>
+              <a:ext cx="2904019" cy="461665"/>
+            </a:xfrm>
+            <a:prstGeom prst="rect">
+              <a:avLst/>
+            </a:prstGeom>
+            <a:noFill/>
+          </p:spPr>
+          <p:txBody>
+            <a:bodyPr wrap="square" rtlCol="0">
+              <a:spAutoFit/>
+            </a:bodyPr>
+            <a:lstStyle/>
+            <a:p>
+              <a:pPr algn="ctr"/>
+              <a:r>
+                <a:rPr lang="en-US" sz="2400" b="1" i="1" dirty="0">
+                  <a:latin typeface="Times New Roman" panose="02020603050405020304" pitchFamily="18" charset="0"/>
+                  <a:ea typeface="Malgun Gothic" panose="020B0503020000020004" pitchFamily="34" charset="-127"/>
+                  <a:cs typeface="Times New Roman" panose="02020603050405020304" pitchFamily="18" charset="0"/>
+                </a:rPr>
+                <a:t>S</a:t>
+              </a:r>
+              <a:r>
+                <a:rPr lang="en-US" sz="2400" b="1" baseline="-25000" dirty="0">
+                  <a:latin typeface="Times New Roman" panose="02020603050405020304" pitchFamily="18" charset="0"/>
+                  <a:ea typeface="Malgun Gothic" panose="020B0503020000020004" pitchFamily="34" charset="-127"/>
+                  <a:cs typeface="Times New Roman" panose="02020603050405020304" pitchFamily="18" charset="0"/>
+                </a:rPr>
+                <a:t>2 </a:t>
+              </a:r>
+              <a:r>
+                <a:rPr lang="en-US" sz="2400" dirty="0">
+                  <a:latin typeface="Times New Roman" panose="02020603050405020304" pitchFamily="18" charset="0"/>
+                  <a:ea typeface="Malgun Gothic" panose="020B0503020000020004" pitchFamily="34" charset="-127"/>
+                  <a:cs typeface="Times New Roman" panose="02020603050405020304" pitchFamily="18" charset="0"/>
+                </a:rPr>
+                <a:t>OFF</a:t>
+              </a:r>
+              <a:endParaRPr lang="en-PH" sz="2400" b="1" dirty="0">
+                <a:latin typeface="Times New Roman" panose="02020603050405020304" pitchFamily="18" charset="0"/>
+                <a:ea typeface="Malgun Gothic" panose="020B0503020000020004" pitchFamily="34" charset="-127"/>
+                <a:cs typeface="Times New Roman" panose="02020603050405020304" pitchFamily="18" charset="0"/>
+              </a:endParaRPr>
+            </a:p>
+          </p:txBody>
+        </p:sp>
+        <p:cxnSp>
+          <p:nvCxnSpPr>
+            <p:cNvPr id="31" name="Straight Arrow Connector 30">
+              <a:extLst>
+                <a:ext uri="{FF2B5EF4-FFF2-40B4-BE49-F238E27FC236}">
+                  <a16:creationId xmlns:a16="http://schemas.microsoft.com/office/drawing/2014/main" id="{018E1BEF-6166-E9D3-6652-139A5741E77B}"/>
+                </a:ext>
+              </a:extLst>
+            </p:cNvPr>
+            <p:cNvCxnSpPr>
+              <a:cxnSpLocks/>
+            </p:cNvCxnSpPr>
+            <p:nvPr/>
+          </p:nvCxnSpPr>
+          <p:spPr>
+            <a:xfrm flipH="1">
+              <a:off x="6162416" y="2754404"/>
+              <a:ext cx="1180506" cy="0"/>
+            </a:xfrm>
+            <a:prstGeom prst="straightConnector1">
+              <a:avLst/>
+            </a:prstGeom>
+            <a:ln w="38100">
+              <a:solidFill>
+                <a:schemeClr val="tx1"/>
+              </a:solidFill>
+              <a:tailEnd type="triangle"/>
+            </a:ln>
+          </p:spPr>
+          <p:style>
+            <a:lnRef idx="1">
+              <a:schemeClr val="accent1"/>
+            </a:lnRef>
+            <a:fillRef idx="0">
+              <a:schemeClr val="accent1"/>
+            </a:fillRef>
+            <a:effectRef idx="0">
+              <a:schemeClr val="accent1"/>
+            </a:effectRef>
+            <a:fontRef idx="minor">
+              <a:schemeClr val="tx1"/>
+            </a:fontRef>
+          </p:style>
+        </p:cxnSp>
+        <p:cxnSp>
+          <p:nvCxnSpPr>
+            <p:cNvPr id="32" name="Straight Arrow Connector 31">
+              <a:extLst>
+                <a:ext uri="{FF2B5EF4-FFF2-40B4-BE49-F238E27FC236}">
+                  <a16:creationId xmlns:a16="http://schemas.microsoft.com/office/drawing/2014/main" id="{63E39A67-685C-6489-6FE2-90730612A4CB}"/>
+                </a:ext>
+              </a:extLst>
+            </p:cNvPr>
+            <p:cNvCxnSpPr>
+              <a:cxnSpLocks/>
+            </p:cNvCxnSpPr>
+            <p:nvPr/>
+          </p:nvCxnSpPr>
+          <p:spPr>
+            <a:xfrm>
+              <a:off x="9241709" y="2754404"/>
+              <a:ext cx="1043981" cy="0"/>
+            </a:xfrm>
+            <a:prstGeom prst="straightConnector1">
+              <a:avLst/>
+            </a:prstGeom>
+            <a:ln w="38100">
+              <a:solidFill>
+                <a:schemeClr val="tx1"/>
+              </a:solidFill>
+              <a:tailEnd type="triangle"/>
+            </a:ln>
+          </p:spPr>
+          <p:style>
+            <a:lnRef idx="1">
+              <a:schemeClr val="accent1"/>
+            </a:lnRef>
+            <a:fillRef idx="0">
+              <a:schemeClr val="accent1"/>
+            </a:fillRef>
+            <a:effectRef idx="0">
+              <a:schemeClr val="accent1"/>
+            </a:effectRef>
+            <a:fontRef idx="minor">
+              <a:schemeClr val="tx1"/>
+            </a:fontRef>
+          </p:style>
+        </p:cxnSp>
+      </p:grpSp>
+      <p:sp>
+        <p:nvSpPr>
+          <p:cNvPr id="51" name="TextBox 6">
+            <a:extLst>
+              <a:ext uri="{FF2B5EF4-FFF2-40B4-BE49-F238E27FC236}">
+                <a16:creationId xmlns:a16="http://schemas.microsoft.com/office/drawing/2014/main" id="{64A1E7A2-D9F5-2FB4-BE35-9D3B75FE6845}"/>
+              </a:ext>
+            </a:extLst>
+          </p:cNvPr>
+          <p:cNvSpPr txBox="1"/>
+          <p:nvPr/>
+        </p:nvSpPr>
+        <p:spPr>
+          <a:xfrm>
+            <a:off x="9109279" y="1277963"/>
+            <a:ext cx="2641401" cy="646331"/>
+          </a:xfrm>
+          <a:prstGeom prst="rect">
+            <a:avLst/>
+          </a:prstGeom>
+          <a:noFill/>
+        </p:spPr>
+        <p:txBody>
+          <a:bodyPr wrap="square" rtlCol="0">
+            <a:spAutoFit/>
+          </a:bodyPr>
+          <a:lstStyle/>
+          <a:p>
+            <a:pPr algn="r"/>
+            <a:r>
+              <a:rPr lang="en-PH" sz="3600" b="1" i="1" dirty="0">
+                <a:latin typeface="Times New Roman" panose="02020603050405020304" pitchFamily="18" charset="0"/>
+                <a:ea typeface="Malgun Gothic" panose="020B0503020000020004" pitchFamily="34" charset="-127"/>
+                <a:cs typeface="Times New Roman" panose="02020603050405020304" pitchFamily="18" charset="0"/>
+              </a:rPr>
+              <a:t>v</a:t>
+            </a:r>
+            <a:r>
+              <a:rPr lang="en-PH" sz="3600" b="1" i="1" baseline="-25000" dirty="0">
+                <a:latin typeface="Times New Roman" panose="02020603050405020304" pitchFamily="18" charset="0"/>
+                <a:ea typeface="Malgun Gothic" panose="020B0503020000020004" pitchFamily="34" charset="-127"/>
+                <a:cs typeface="Times New Roman" panose="02020603050405020304" pitchFamily="18" charset="0"/>
+              </a:rPr>
+              <a:t>in</a:t>
+            </a:r>
+          </a:p>
+        </p:txBody>
+      </p:sp>
+      <p:sp>
+        <p:nvSpPr>
+          <p:cNvPr id="52" name="TextBox 7">
+            <a:extLst>
+              <a:ext uri="{FF2B5EF4-FFF2-40B4-BE49-F238E27FC236}">
+                <a16:creationId xmlns:a16="http://schemas.microsoft.com/office/drawing/2014/main" id="{6CB20BEB-24EA-1A97-53D6-DA4E58C32FD9}"/>
+              </a:ext>
+            </a:extLst>
+          </p:cNvPr>
+          <p:cNvSpPr txBox="1"/>
+          <p:nvPr/>
+        </p:nvSpPr>
+        <p:spPr>
+          <a:xfrm>
+            <a:off x="9109279" y="2672857"/>
+            <a:ext cx="2641401" cy="646331"/>
+          </a:xfrm>
+          <a:prstGeom prst="rect">
+            <a:avLst/>
+          </a:prstGeom>
+          <a:noFill/>
+        </p:spPr>
+        <p:txBody>
+          <a:bodyPr wrap="square" rtlCol="0">
+            <a:spAutoFit/>
+          </a:bodyPr>
+          <a:lstStyle/>
+          <a:p>
+            <a:pPr algn="r"/>
+            <a:r>
+              <a:rPr lang="en-PH" sz="3600" b="1" i="1" dirty="0">
+                <a:solidFill>
+                  <a:srgbClr val="21C2C8"/>
+                </a:solidFill>
+                <a:latin typeface="Times New Roman" panose="02020603050405020304" pitchFamily="18" charset="0"/>
+                <a:ea typeface="Malgun Gothic" panose="020B0503020000020004" pitchFamily="34" charset="-127"/>
+                <a:cs typeface="Times New Roman" panose="02020603050405020304" pitchFamily="18" charset="0"/>
+              </a:rPr>
+              <a:t>V</a:t>
+            </a:r>
+            <a:r>
+              <a:rPr lang="en-PH" sz="3600" b="1" i="1" baseline="-25000" dirty="0">
+                <a:solidFill>
+                  <a:srgbClr val="21C2C8"/>
+                </a:solidFill>
+                <a:latin typeface="Times New Roman" panose="02020603050405020304" pitchFamily="18" charset="0"/>
+                <a:ea typeface="Malgun Gothic" panose="020B0503020000020004" pitchFamily="34" charset="-127"/>
+                <a:cs typeface="Times New Roman" panose="02020603050405020304" pitchFamily="18" charset="0"/>
+              </a:rPr>
+              <a:t>o</a:t>
+            </a:r>
+          </a:p>
+        </p:txBody>
+      </p:sp>
+      <p:sp>
+        <p:nvSpPr>
+          <p:cNvPr id="53" name="TextBox 8">
+            <a:extLst>
+              <a:ext uri="{FF2B5EF4-FFF2-40B4-BE49-F238E27FC236}">
+                <a16:creationId xmlns:a16="http://schemas.microsoft.com/office/drawing/2014/main" id="{B4479E57-FF45-3975-B27D-C192FB90D327}"/>
+              </a:ext>
+            </a:extLst>
+          </p:cNvPr>
+          <p:cNvSpPr txBox="1"/>
+          <p:nvPr/>
+        </p:nvSpPr>
+        <p:spPr>
+          <a:xfrm>
+            <a:off x="9247499" y="3633569"/>
+            <a:ext cx="2641401" cy="646331"/>
+          </a:xfrm>
+          <a:prstGeom prst="rect">
+            <a:avLst/>
+          </a:prstGeom>
+          <a:noFill/>
+        </p:spPr>
+        <p:txBody>
+          <a:bodyPr wrap="square" rtlCol="0">
+            <a:spAutoFit/>
+          </a:bodyPr>
+          <a:lstStyle/>
+          <a:p>
+            <a:pPr algn="r"/>
+            <a:r>
+              <a:rPr lang="en-PH" sz="3600" b="1" i="1" dirty="0">
+                <a:solidFill>
+                  <a:srgbClr val="E83154"/>
+                </a:solidFill>
+                <a:latin typeface="Times New Roman" panose="02020603050405020304" pitchFamily="18" charset="0"/>
+                <a:ea typeface="Malgun Gothic" panose="020B0503020000020004" pitchFamily="34" charset="-127"/>
+                <a:cs typeface="Times New Roman" panose="02020603050405020304" pitchFamily="18" charset="0"/>
+              </a:rPr>
+              <a:t>v</a:t>
+            </a:r>
+            <a:r>
+              <a:rPr lang="en-PH" sz="3600" b="1" i="1" baseline="-25000" dirty="0">
+                <a:solidFill>
+                  <a:srgbClr val="E83154"/>
+                </a:solidFill>
+                <a:latin typeface="Times New Roman" panose="02020603050405020304" pitchFamily="18" charset="0"/>
+                <a:ea typeface="Malgun Gothic" panose="020B0503020000020004" pitchFamily="34" charset="-127"/>
+                <a:cs typeface="Times New Roman" panose="02020603050405020304" pitchFamily="18" charset="0"/>
+              </a:rPr>
+              <a:t>ds</a:t>
+            </a:r>
+            <a:r>
+              <a:rPr lang="en-PH" sz="3600" b="1" baseline="-25000" dirty="0">
+                <a:solidFill>
+                  <a:srgbClr val="E83154"/>
+                </a:solidFill>
+                <a:latin typeface="Times New Roman" panose="02020603050405020304" pitchFamily="18" charset="0"/>
+                <a:ea typeface="Malgun Gothic" panose="020B0503020000020004" pitchFamily="34" charset="-127"/>
+                <a:cs typeface="Times New Roman" panose="02020603050405020304" pitchFamily="18" charset="0"/>
+              </a:rPr>
+              <a:t>1,</a:t>
+            </a:r>
+            <a:r>
+              <a:rPr lang="en-PH" sz="3600" b="1" dirty="0">
+                <a:solidFill>
+                  <a:srgbClr val="E83154"/>
+                </a:solidFill>
+                <a:latin typeface="Times New Roman" panose="02020603050405020304" pitchFamily="18" charset="0"/>
+                <a:ea typeface="Malgun Gothic" panose="020B0503020000020004" pitchFamily="34" charset="-127"/>
+                <a:cs typeface="Times New Roman" panose="02020603050405020304" pitchFamily="18" charset="0"/>
+              </a:rPr>
+              <a:t> </a:t>
+            </a:r>
+            <a:r>
+              <a:rPr lang="en-PH" sz="3600" b="1" i="1" dirty="0">
+                <a:solidFill>
+                  <a:srgbClr val="93CF33"/>
+                </a:solidFill>
+                <a:latin typeface="Times New Roman" panose="02020603050405020304" pitchFamily="18" charset="0"/>
+                <a:ea typeface="Malgun Gothic" panose="020B0503020000020004" pitchFamily="34" charset="-127"/>
+                <a:cs typeface="Times New Roman" panose="02020603050405020304" pitchFamily="18" charset="0"/>
+              </a:rPr>
+              <a:t>v</a:t>
+            </a:r>
+            <a:r>
+              <a:rPr lang="en-PH" sz="3600" b="1" i="1" baseline="-25000" dirty="0">
+                <a:solidFill>
+                  <a:srgbClr val="93CF33"/>
+                </a:solidFill>
+                <a:latin typeface="Times New Roman" panose="02020603050405020304" pitchFamily="18" charset="0"/>
+                <a:ea typeface="Malgun Gothic" panose="020B0503020000020004" pitchFamily="34" charset="-127"/>
+                <a:cs typeface="Times New Roman" panose="02020603050405020304" pitchFamily="18" charset="0"/>
+              </a:rPr>
+              <a:t>ds</a:t>
+            </a:r>
+            <a:r>
+              <a:rPr lang="en-PH" sz="3600" b="1" baseline="-25000" dirty="0">
+                <a:solidFill>
+                  <a:srgbClr val="93CF33"/>
+                </a:solidFill>
+                <a:latin typeface="Times New Roman" panose="02020603050405020304" pitchFamily="18" charset="0"/>
+                <a:ea typeface="Malgun Gothic" panose="020B0503020000020004" pitchFamily="34" charset="-127"/>
+                <a:cs typeface="Times New Roman" panose="02020603050405020304" pitchFamily="18" charset="0"/>
+              </a:rPr>
+              <a:t>2</a:t>
+            </a:r>
+          </a:p>
+        </p:txBody>
+      </p:sp>
+      <p:sp>
+        <p:nvSpPr>
+          <p:cNvPr id="54" name="TextBox 9">
+            <a:extLst>
+              <a:ext uri="{FF2B5EF4-FFF2-40B4-BE49-F238E27FC236}">
+                <a16:creationId xmlns:a16="http://schemas.microsoft.com/office/drawing/2014/main" id="{B760B802-B0DC-81E6-CC76-39F7F5906EB2}"/>
+              </a:ext>
+            </a:extLst>
+          </p:cNvPr>
+          <p:cNvSpPr txBox="1"/>
+          <p:nvPr/>
+        </p:nvSpPr>
+        <p:spPr>
+          <a:xfrm>
+            <a:off x="9369480" y="4976375"/>
+            <a:ext cx="2542843" cy="646331"/>
+          </a:xfrm>
+          <a:prstGeom prst="rect">
+            <a:avLst/>
+          </a:prstGeom>
+          <a:noFill/>
+        </p:spPr>
+        <p:txBody>
+          <a:bodyPr wrap="square" rtlCol="0">
+            <a:spAutoFit/>
+          </a:bodyPr>
+          <a:lstStyle/>
+          <a:p>
+            <a:pPr algn="r"/>
+            <a:r>
+              <a:rPr lang="en-PH" sz="3600" b="1" i="1" dirty="0">
+                <a:solidFill>
+                  <a:srgbClr val="FD9116"/>
+                </a:solidFill>
+                <a:latin typeface="Times New Roman" panose="02020603050405020304" pitchFamily="18" charset="0"/>
+                <a:ea typeface="Malgun Gothic" panose="020B0503020000020004" pitchFamily="34" charset="-127"/>
+                <a:cs typeface="Times New Roman" panose="02020603050405020304" pitchFamily="18" charset="0"/>
+              </a:rPr>
+              <a:t>i</a:t>
+            </a:r>
+            <a:r>
+              <a:rPr lang="en-PH" sz="3600" b="1" i="1" baseline="-25000" dirty="0">
+                <a:solidFill>
+                  <a:srgbClr val="FD9116"/>
+                </a:solidFill>
+                <a:latin typeface="Times New Roman" panose="02020603050405020304" pitchFamily="18" charset="0"/>
+                <a:ea typeface="Malgun Gothic" panose="020B0503020000020004" pitchFamily="34" charset="-127"/>
+                <a:cs typeface="Times New Roman" panose="02020603050405020304" pitchFamily="18" charset="0"/>
+              </a:rPr>
+              <a:t>S</a:t>
+            </a:r>
+            <a:r>
+              <a:rPr lang="en-PH" sz="3600" b="1" baseline="-25000" dirty="0">
+                <a:solidFill>
+                  <a:srgbClr val="FD9116"/>
+                </a:solidFill>
+                <a:latin typeface="Times New Roman" panose="02020603050405020304" pitchFamily="18" charset="0"/>
+                <a:ea typeface="Malgun Gothic" panose="020B0503020000020004" pitchFamily="34" charset="-127"/>
+                <a:cs typeface="Times New Roman" panose="02020603050405020304" pitchFamily="18" charset="0"/>
+              </a:rPr>
+              <a:t>1</a:t>
+            </a:r>
+            <a:r>
+              <a:rPr lang="en-PH" sz="3600" b="1" baseline="-25000" dirty="0">
+                <a:latin typeface="Times New Roman" panose="02020603050405020304" pitchFamily="18" charset="0"/>
+                <a:ea typeface="Malgun Gothic" panose="020B0503020000020004" pitchFamily="34" charset="-127"/>
+                <a:cs typeface="Times New Roman" panose="02020603050405020304" pitchFamily="18" charset="0"/>
+              </a:rPr>
+              <a:t>,</a:t>
+            </a:r>
+            <a:r>
+              <a:rPr lang="en-PH" sz="3600" b="1" dirty="0">
+                <a:solidFill>
+                  <a:srgbClr val="E83154"/>
+                </a:solidFill>
+                <a:latin typeface="Times New Roman" panose="02020603050405020304" pitchFamily="18" charset="0"/>
+                <a:ea typeface="Malgun Gothic" panose="020B0503020000020004" pitchFamily="34" charset="-127"/>
+                <a:cs typeface="Times New Roman" panose="02020603050405020304" pitchFamily="18" charset="0"/>
+              </a:rPr>
+              <a:t> </a:t>
+            </a:r>
+            <a:r>
+              <a:rPr lang="en-PH" sz="3600" b="1" i="1" dirty="0">
+                <a:solidFill>
+                  <a:srgbClr val="2424B7"/>
+                </a:solidFill>
+                <a:latin typeface="Times New Roman" panose="02020603050405020304" pitchFamily="18" charset="0"/>
+                <a:ea typeface="Malgun Gothic" panose="020B0503020000020004" pitchFamily="34" charset="-127"/>
+                <a:cs typeface="Times New Roman" panose="02020603050405020304" pitchFamily="18" charset="0"/>
+              </a:rPr>
+              <a:t>i</a:t>
+            </a:r>
+            <a:r>
+              <a:rPr lang="en-PH" sz="3600" b="1" i="1" baseline="-25000" dirty="0">
+                <a:solidFill>
+                  <a:srgbClr val="2424B7"/>
+                </a:solidFill>
+                <a:latin typeface="Times New Roman" panose="02020603050405020304" pitchFamily="18" charset="0"/>
+                <a:ea typeface="Malgun Gothic" panose="020B0503020000020004" pitchFamily="34" charset="-127"/>
+                <a:cs typeface="Times New Roman" panose="02020603050405020304" pitchFamily="18" charset="0"/>
+              </a:rPr>
+              <a:t>S</a:t>
+            </a:r>
+            <a:r>
+              <a:rPr lang="en-PH" sz="3600" b="1" baseline="-25000" dirty="0">
+                <a:solidFill>
+                  <a:srgbClr val="2424B7"/>
+                </a:solidFill>
+                <a:latin typeface="Times New Roman" panose="02020603050405020304" pitchFamily="18" charset="0"/>
+                <a:ea typeface="Malgun Gothic" panose="020B0503020000020004" pitchFamily="34" charset="-127"/>
+                <a:cs typeface="Times New Roman" panose="02020603050405020304" pitchFamily="18" charset="0"/>
+              </a:rPr>
+              <a:t>2</a:t>
+            </a:r>
+          </a:p>
+        </p:txBody>
+      </p:sp>
+      <p:sp>
+        <p:nvSpPr>
+          <p:cNvPr id="55" name="TextBox 10">
+            <a:extLst>
+              <a:ext uri="{FF2B5EF4-FFF2-40B4-BE49-F238E27FC236}">
+                <a16:creationId xmlns:a16="http://schemas.microsoft.com/office/drawing/2014/main" id="{A3348425-5A2F-1ED4-D929-E780AC78278F}"/>
+              </a:ext>
+            </a:extLst>
+          </p:cNvPr>
+          <p:cNvSpPr txBox="1"/>
+          <p:nvPr/>
+        </p:nvSpPr>
+        <p:spPr>
+          <a:xfrm>
+            <a:off x="9391918" y="6379199"/>
+            <a:ext cx="2496981" cy="646331"/>
+          </a:xfrm>
+          <a:prstGeom prst="rect">
+            <a:avLst/>
+          </a:prstGeom>
+          <a:noFill/>
+        </p:spPr>
+        <p:txBody>
+          <a:bodyPr wrap="square" rtlCol="0">
+            <a:spAutoFit/>
+          </a:bodyPr>
+          <a:lstStyle/>
+          <a:p>
+            <a:pPr algn="r"/>
+            <a:r>
+              <a:rPr lang="en-PH" sz="3600" b="1" i="1" dirty="0">
+                <a:solidFill>
+                  <a:srgbClr val="D8469D"/>
+                </a:solidFill>
+                <a:latin typeface="Times New Roman" panose="02020603050405020304" pitchFamily="18" charset="0"/>
+                <a:ea typeface="Malgun Gothic" panose="020B0503020000020004" pitchFamily="34" charset="-127"/>
+                <a:cs typeface="Times New Roman" panose="02020603050405020304" pitchFamily="18" charset="0"/>
+              </a:rPr>
+              <a:t>i</a:t>
+            </a:r>
+            <a:r>
+              <a:rPr lang="en-PH" sz="3600" b="1" i="1" baseline="-25000" dirty="0">
+                <a:solidFill>
+                  <a:srgbClr val="D8469D"/>
+                </a:solidFill>
+                <a:latin typeface="Times New Roman" panose="02020603050405020304" pitchFamily="18" charset="0"/>
+                <a:ea typeface="Malgun Gothic" panose="020B0503020000020004" pitchFamily="34" charset="-127"/>
+                <a:cs typeface="Times New Roman" panose="02020603050405020304" pitchFamily="18" charset="0"/>
+              </a:rPr>
+              <a:t>D</a:t>
+            </a:r>
+            <a:r>
+              <a:rPr lang="en-PH" sz="3600" b="1" baseline="-25000" dirty="0">
+                <a:solidFill>
+                  <a:srgbClr val="D8469D"/>
+                </a:solidFill>
+                <a:latin typeface="Times New Roman" panose="02020603050405020304" pitchFamily="18" charset="0"/>
+                <a:ea typeface="Malgun Gothic" panose="020B0503020000020004" pitchFamily="34" charset="-127"/>
+                <a:cs typeface="Times New Roman" panose="02020603050405020304" pitchFamily="18" charset="0"/>
+              </a:rPr>
+              <a:t>1</a:t>
+            </a:r>
+            <a:r>
+              <a:rPr lang="en-PH" sz="3600" b="1" baseline="-25000" dirty="0">
+                <a:latin typeface="Times New Roman" panose="02020603050405020304" pitchFamily="18" charset="0"/>
+                <a:ea typeface="Malgun Gothic" panose="020B0503020000020004" pitchFamily="34" charset="-127"/>
+                <a:cs typeface="Times New Roman" panose="02020603050405020304" pitchFamily="18" charset="0"/>
+              </a:rPr>
+              <a:t>,</a:t>
+            </a:r>
+            <a:r>
+              <a:rPr lang="en-PH" sz="3600" b="1" dirty="0">
+                <a:solidFill>
+                  <a:srgbClr val="E83154"/>
+                </a:solidFill>
+                <a:latin typeface="Times New Roman" panose="02020603050405020304" pitchFamily="18" charset="0"/>
+                <a:ea typeface="Malgun Gothic" panose="020B0503020000020004" pitchFamily="34" charset="-127"/>
+                <a:cs typeface="Times New Roman" panose="02020603050405020304" pitchFamily="18" charset="0"/>
+              </a:rPr>
+              <a:t> </a:t>
+            </a:r>
+            <a:r>
+              <a:rPr lang="en-PH" sz="3600" b="1" i="1" dirty="0">
+                <a:solidFill>
+                  <a:srgbClr val="01D995"/>
+                </a:solidFill>
+                <a:latin typeface="Times New Roman" panose="02020603050405020304" pitchFamily="18" charset="0"/>
+                <a:ea typeface="Malgun Gothic" panose="020B0503020000020004" pitchFamily="34" charset="-127"/>
+                <a:cs typeface="Times New Roman" panose="02020603050405020304" pitchFamily="18" charset="0"/>
+              </a:rPr>
+              <a:t>i</a:t>
+            </a:r>
+            <a:r>
+              <a:rPr lang="en-PH" sz="3600" b="1" i="1" baseline="-25000" dirty="0">
+                <a:solidFill>
+                  <a:srgbClr val="01D995"/>
+                </a:solidFill>
+                <a:latin typeface="Times New Roman" panose="02020603050405020304" pitchFamily="18" charset="0"/>
+                <a:ea typeface="Malgun Gothic" panose="020B0503020000020004" pitchFamily="34" charset="-127"/>
+                <a:cs typeface="Times New Roman" panose="02020603050405020304" pitchFamily="18" charset="0"/>
+              </a:rPr>
+              <a:t>D</a:t>
+            </a:r>
+            <a:r>
+              <a:rPr lang="en-PH" sz="3600" b="1" baseline="-25000" dirty="0">
+                <a:solidFill>
+                  <a:srgbClr val="01D995"/>
+                </a:solidFill>
+                <a:latin typeface="Times New Roman" panose="02020603050405020304" pitchFamily="18" charset="0"/>
+                <a:ea typeface="Malgun Gothic" panose="020B0503020000020004" pitchFamily="34" charset="-127"/>
+                <a:cs typeface="Times New Roman" panose="02020603050405020304" pitchFamily="18" charset="0"/>
+              </a:rPr>
+              <a:t>2</a:t>
+            </a:r>
+          </a:p>
+        </p:txBody>
+      </p:sp>
+      <p:cxnSp>
+        <p:nvCxnSpPr>
+          <p:cNvPr id="2" name="Straight Arrow Connector 1">
+            <a:extLst>
+              <a:ext uri="{FF2B5EF4-FFF2-40B4-BE49-F238E27FC236}">
+                <a16:creationId xmlns:a16="http://schemas.microsoft.com/office/drawing/2014/main" id="{26A52127-72C5-D035-1204-D42DA6835028}"/>
+              </a:ext>
+            </a:extLst>
+          </p:cNvPr>
+          <p:cNvCxnSpPr>
+            <a:cxnSpLocks/>
+          </p:cNvCxnSpPr>
+          <p:nvPr/>
+        </p:nvCxnSpPr>
+        <p:spPr>
+          <a:xfrm>
+            <a:off x="1333872" y="1903024"/>
+            <a:ext cx="1267528" cy="0"/>
+          </a:xfrm>
+          <a:prstGeom prst="straightConnector1">
+            <a:avLst/>
+          </a:prstGeom>
+          <a:ln w="38100">
+            <a:solidFill>
+              <a:schemeClr val="tx1"/>
+            </a:solidFill>
+            <a:headEnd type="triangle"/>
+            <a:tailEnd type="triangle"/>
+          </a:ln>
+        </p:spPr>
+        <p:style>
+          <a:lnRef idx="1">
+            <a:schemeClr val="accent1"/>
+          </a:lnRef>
+          <a:fillRef idx="0">
+            <a:schemeClr val="accent1"/>
+          </a:fillRef>
+          <a:effectRef idx="0">
+            <a:schemeClr val="accent1"/>
+          </a:effectRef>
+          <a:fontRef idx="minor">
+            <a:schemeClr val="tx1"/>
+          </a:fontRef>
+        </p:style>
+      </p:cxnSp>
+      <mc:AlternateContent xmlns:mc="http://schemas.openxmlformats.org/markup-compatibility/2006" xmlns:a14="http://schemas.microsoft.com/office/drawing/2010/main">
+        <mc:Choice Requires="a14">
+          <p:sp>
+            <p:nvSpPr>
+              <p:cNvPr id="3" name="TextBox 2">
+                <a:extLst>
+                  <a:ext uri="{FF2B5EF4-FFF2-40B4-BE49-F238E27FC236}">
+                    <a16:creationId xmlns:a16="http://schemas.microsoft.com/office/drawing/2014/main" id="{6D35A7C6-86C4-6D65-95BC-590339D8FFF4}"/>
+                  </a:ext>
+                </a:extLst>
+              </p:cNvPr>
+              <p:cNvSpPr txBox="1"/>
+              <p:nvPr/>
+            </p:nvSpPr>
+            <p:spPr>
+              <a:xfrm>
+                <a:off x="1165275" y="1436201"/>
+                <a:ext cx="1572470" cy="461665"/>
+              </a:xfrm>
+              <a:prstGeom prst="rect">
+                <a:avLst/>
+              </a:prstGeom>
+              <a:noFill/>
+            </p:spPr>
+            <p:txBody>
+              <a:bodyPr wrap="square" rtlCol="0">
+                <a:spAutoFit/>
+              </a:bodyPr>
+              <a:lstStyle/>
+              <a:p>
+                <a:pPr algn="ctr"/>
+                <a:r>
+                  <a:rPr lang="en-PH" sz="2400" b="1" dirty="0">
+                    <a:latin typeface="Times New Roman" panose="02020603050405020304" pitchFamily="18" charset="0"/>
+                    <a:ea typeface="Malgun Gothic" panose="020B0503020000020004" pitchFamily="34" charset="-127"/>
+                    <a:cs typeface="Times New Roman" panose="02020603050405020304" pitchFamily="18" charset="0"/>
+                  </a:rPr>
+                  <a:t>2 </a:t>
+                </a:r>
+                <a14:m>
+                  <m:oMath xmlns:m="http://schemas.openxmlformats.org/officeDocument/2006/math">
+                    <m:r>
+                      <a:rPr lang="en-US" sz="2400" b="1" i="1" smtClean="0">
+                        <a:latin typeface="Cambria Math" panose="02040503050406030204" pitchFamily="18" charset="0"/>
+                        <a:ea typeface="Malgun Gothic" panose="020B0503020000020004" pitchFamily="34" charset="-127"/>
+                        <a:cs typeface="Times New Roman" panose="02020603050405020304" pitchFamily="18" charset="0"/>
+                      </a:rPr>
+                      <m:t>𝝁</m:t>
+                    </m:r>
+                  </m:oMath>
+                </a14:m>
+                <a:r>
+                  <a:rPr lang="en-PH" sz="2400" b="1" dirty="0">
+                    <a:latin typeface="Times New Roman" panose="02020603050405020304" pitchFamily="18" charset="0"/>
+                    <a:ea typeface="Malgun Gothic" panose="020B0503020000020004" pitchFamily="34" charset="-127"/>
+                    <a:cs typeface="Times New Roman" panose="02020603050405020304" pitchFamily="18" charset="0"/>
+                  </a:rPr>
+                  <a:t>s/div.</a:t>
+                </a:r>
+                <a:endParaRPr lang="en-PH" sz="2400" b="1" baseline="-25000" dirty="0">
+                  <a:latin typeface="Times New Roman" panose="02020603050405020304" pitchFamily="18" charset="0"/>
+                  <a:ea typeface="Malgun Gothic" panose="020B0503020000020004" pitchFamily="34" charset="-127"/>
+                  <a:cs typeface="Times New Roman" panose="02020603050405020304" pitchFamily="18" charset="0"/>
+                </a:endParaRPr>
+              </a:p>
+            </p:txBody>
+          </p:sp>
+        </mc:Choice>
+        <mc:Fallback xmlns="">
+          <p:sp>
+            <p:nvSpPr>
+              <p:cNvPr id="3" name="TextBox 2">
+                <a:extLst>
+                  <a:ext uri="{FF2B5EF4-FFF2-40B4-BE49-F238E27FC236}">
+                    <a16:creationId xmlns:a16="http://schemas.microsoft.com/office/drawing/2014/main" id="{99801CBC-2641-80C7-14AF-9AA3CA11C8AD}"/>
+                  </a:ext>
+                </a:extLst>
+              </p:cNvPr>
+              <p:cNvSpPr txBox="1">
+                <a:spLocks noRot="1" noChangeAspect="1" noMove="1" noResize="1" noEditPoints="1" noAdjustHandles="1" noChangeArrowheads="1" noChangeShapeType="1" noTextEdit="1"/>
+              </p:cNvSpPr>
+              <p:nvPr/>
+            </p:nvSpPr>
+            <p:spPr>
+              <a:xfrm>
+                <a:off x="1165275" y="1436201"/>
+                <a:ext cx="1572470" cy="461665"/>
+              </a:xfrm>
+              <a:prstGeom prst="rect">
+                <a:avLst/>
+              </a:prstGeom>
+              <a:blipFill>
+                <a:blip r:embed="rId5"/>
+                <a:stretch>
+                  <a:fillRect t="-10667" b="-30667"/>
+                </a:stretch>
+              </a:blipFill>
+            </p:spPr>
+            <p:txBody>
+              <a:bodyPr/>
+              <a:lstStyle/>
+              <a:p>
+                <a:r>
+                  <a:rPr lang="en-US">
+                    <a:noFill/>
+                  </a:rPr>
+                  <a:t> </a:t>
+                </a:r>
+              </a:p>
+            </p:txBody>
+          </p:sp>
+        </mc:Fallback>
+      </mc:AlternateContent>
+      <p:cxnSp>
+        <p:nvCxnSpPr>
+          <p:cNvPr id="10" name="Straight Connector 9">
+            <a:extLst>
+              <a:ext uri="{FF2B5EF4-FFF2-40B4-BE49-F238E27FC236}">
+                <a16:creationId xmlns:a16="http://schemas.microsoft.com/office/drawing/2014/main" id="{222D3FF5-2A99-CA5D-F9C1-B1B0EAD88FF2}"/>
+              </a:ext>
+            </a:extLst>
+          </p:cNvPr>
+          <p:cNvCxnSpPr>
+            <a:cxnSpLocks/>
+          </p:cNvCxnSpPr>
+          <p:nvPr/>
+        </p:nvCxnSpPr>
+        <p:spPr>
+          <a:xfrm>
+            <a:off x="0" y="2309855"/>
+            <a:ext cx="12192000" cy="0"/>
+          </a:xfrm>
+          <a:prstGeom prst="line">
+            <a:avLst/>
+          </a:prstGeom>
+          <a:ln>
+            <a:solidFill>
+              <a:schemeClr val="bg1"/>
+            </a:solidFill>
+          </a:ln>
+        </p:spPr>
+        <p:style>
+          <a:lnRef idx="2">
+            <a:schemeClr val="accent1"/>
+          </a:lnRef>
+          <a:fillRef idx="0">
+            <a:schemeClr val="accent1"/>
+          </a:fillRef>
+          <a:effectRef idx="1">
+            <a:schemeClr val="accent1"/>
+          </a:effectRef>
+          <a:fontRef idx="minor">
+            <a:schemeClr val="tx1"/>
+          </a:fontRef>
+        </p:style>
+      </p:cxnSp>
+      <p:cxnSp>
+        <p:nvCxnSpPr>
+          <p:cNvPr id="12" name="Straight Connector 11">
+            <a:extLst>
+              <a:ext uri="{FF2B5EF4-FFF2-40B4-BE49-F238E27FC236}">
+                <a16:creationId xmlns:a16="http://schemas.microsoft.com/office/drawing/2014/main" id="{91D85AAF-0016-4E32-E18C-B36C17FCA34F}"/>
+              </a:ext>
+            </a:extLst>
+          </p:cNvPr>
+          <p:cNvCxnSpPr>
+            <a:cxnSpLocks/>
+          </p:cNvCxnSpPr>
+          <p:nvPr/>
+        </p:nvCxnSpPr>
+        <p:spPr>
+          <a:xfrm>
+            <a:off x="-8293" y="3676914"/>
+            <a:ext cx="12192000" cy="0"/>
+          </a:xfrm>
+          <a:prstGeom prst="line">
+            <a:avLst/>
+          </a:prstGeom>
+          <a:ln>
+            <a:solidFill>
+              <a:schemeClr val="bg1"/>
+            </a:solidFill>
+          </a:ln>
+        </p:spPr>
+        <p:style>
+          <a:lnRef idx="2">
+            <a:schemeClr val="accent1"/>
+          </a:lnRef>
+          <a:fillRef idx="0">
+            <a:schemeClr val="accent1"/>
+          </a:fillRef>
+          <a:effectRef idx="1">
+            <a:schemeClr val="accent1"/>
+          </a:effectRef>
+          <a:fontRef idx="minor">
+            <a:schemeClr val="tx1"/>
+          </a:fontRef>
+        </p:style>
+      </p:cxnSp>
+    </p:spTree>
+    <p:extLst>
+      <p:ext uri="{BB962C8B-B14F-4D97-AF65-F5344CB8AC3E}">
+        <p14:creationId xmlns:p14="http://schemas.microsoft.com/office/powerpoint/2010/main" val="1775455874"/>
+      </p:ext>
+    </p:extLst>
+  </p:cSld>
+  <p:clrMapOvr>
+    <a:masterClrMapping/>
+  </p:clrMapOvr>
+</p:sld>
+</file>
+
+<file path=ppt/slides/slide8.xml><?xml version="1.0" encoding="utf-8"?>
 <p:sld xmlns:a="http://schemas.openxmlformats.org/drawingml/2006/main" xmlns:r="http://schemas.openxmlformats.org/officeDocument/2006/relationships" xmlns:p="http://schemas.openxmlformats.org/presentationml/2006/main" show="0">
   <p:cSld>
     <p:spTree>
@@ -14501,7 +18610,7 @@
 </p:sld>
 </file>
 
-<file path=ppt/slides/slide7.xml><?xml version="1.0" encoding="utf-8"?>
+<file path=ppt/slides/slide9.xml><?xml version="1.0" encoding="utf-8"?>
 <p:sld xmlns:a="http://schemas.openxmlformats.org/drawingml/2006/main" xmlns:r="http://schemas.openxmlformats.org/officeDocument/2006/relationships" xmlns:p="http://schemas.openxmlformats.org/presentationml/2006/main" show="0">
   <p:cSld>
     <p:spTree>
@@ -15253,8 +19362,8 @@
           </a:fontRef>
         </p:style>
       </p:cxnSp>
-      <mc:AlternateContent xmlns:mc="http://schemas.openxmlformats.org/markup-compatibility/2006">
-        <mc:Choice xmlns:a14="http://schemas.microsoft.com/office/drawing/2010/main" Requires="a14">
+      <mc:AlternateContent xmlns:mc="http://schemas.openxmlformats.org/markup-compatibility/2006" xmlns:a14="http://schemas.microsoft.com/office/drawing/2010/main">
+        <mc:Choice Requires="a14">
           <p:sp>
             <p:nvSpPr>
               <p:cNvPr id="4" name="TextBox 3">
@@ -15321,7 +19430,7 @@
             </p:txBody>
           </p:sp>
         </mc:Choice>
-        <mc:Fallback>
+        <mc:Fallback xmlns="">
           <p:sp>
             <p:nvSpPr>
               <p:cNvPr id="4" name="TextBox 3">
